--- a/Topic_C/Exam_Practice/TC-L10_Speaking_Workshop_Measurements_Shapes_Materials.pptx
+++ b/Topic_C/Exam_Practice/TC-L10_Speaking_Workshop_Measurements_Shapes_Materials.pptx
@@ -615,7 +615,11 @@
           <a:lstStyle/>
           <a:p>
             <a:r>
-              <a:rPr lang="en-US" dirty="0"/>
+              <a:rPr lang="ar-SA" dirty="0">
+                <a:latin typeface="Amiri" pitchFamily="2" charset="-78"/>
+                <a:ea typeface="Amiri" pitchFamily="2" charset="-78"/>
+                <a:cs typeface="Amiri" pitchFamily="2" charset="-78"/>
+              </a:rPr>
               <a:t>ROLE PLAY C (Develop) — a design competition.
 SET-UP IN THE BREAKOUT ROOM: A = examiner (reads the left column ONLY — the questions, in order), B = candidate (sees the task column; Core may use the help column), C = observer (ticks the feedback checklist). 1 minute preparation, about 3 minutes speaking, 1 minute feedback, then rotate.
 Task ! is the unexpected question: in the exam the candidate has not seen it — the examiner should read it without warning.
@@ -707,7 +711,11 @@
           <a:lstStyle/>
           <a:p>
             <a:r>
-              <a:rPr lang="en-US" dirty="0"/>
+              <a:rPr lang="ar-SA" dirty="0">
+                <a:latin typeface="Amiri" pitchFamily="2" charset="-78"/>
+                <a:ea typeface="Amiri" pitchFamily="2" charset="-78"/>
+                <a:cs typeface="Amiri" pitchFamily="2" charset="-78"/>
+              </a:rPr>
               <a:t>ROLE PLAY D (Stretch) — a sustainability panel.
 SET-UP IN THE BREAKOUT ROOM: A = examiner (reads the left column ONLY — the questions, in order), B = candidate (sees the task column; Core may use the help column), C = observer (ticks the feedback checklist). 1 minute preparation, about 3 minutes speaking, 1 minute feedback, then rotate.
 Task ! is the unexpected question: in the exam the candidate has not seen it — the examiner should read it without warning.
@@ -1243,7 +1251,11 @@
           <a:lstStyle/>
           <a:p>
             <a:r>
-              <a:rPr lang="en-US" dirty="0"/>
+              <a:rPr lang="ar-SA" dirty="0">
+                <a:latin typeface="Amiri" pitchFamily="2" charset="-78"/>
+                <a:ea typeface="Amiri" pitchFamily="2" charset="-78"/>
+                <a:cs typeface="Amiri" pitchFamily="2" charset="-78"/>
+              </a:rPr>
               <a:t>TOPIC CONVERSATION — Core. Examiner asks the questions in order and may add “لِمَاذَا؟ / هَلْ يُمْكِنُ أَنْ تَشْرَحَ أَكْثَرَ؟” to push for more. Candidate aims for one full sentence per question.
 </a:t>
             </a:r>
@@ -1332,7 +1344,11 @@
           <a:lstStyle/>
           <a:p>
             <a:r>
-              <a:rPr lang="en-US" dirty="0"/>
+              <a:rPr lang="ar-SA" dirty="0">
+                <a:latin typeface="Amiri" pitchFamily="2" charset="-78"/>
+                <a:ea typeface="Amiri" pitchFamily="2" charset="-78"/>
+                <a:cs typeface="Amiri" pitchFamily="2" charset="-78"/>
+              </a:rPr>
               <a:t>TOPIC CONVERSATION — Develop. Examiner asks the questions in order and may add “لِمَاذَا؟ / هَلْ يُمْكِنُ أَنْ تَشْرَحَ أَكْثَرَ؟” to push for more. Candidate aims for two or three sentences, with a measurement and a past detail.
 </a:t>
             </a:r>
@@ -1421,7 +1437,11 @@
           <a:lstStyle/>
           <a:p>
             <a:r>
-              <a:rPr lang="en-US" dirty="0"/>
+              <a:rPr lang="ar-SA" dirty="0">
+                <a:latin typeface="Amiri" pitchFamily="2" charset="-78"/>
+                <a:ea typeface="Amiri" pitchFamily="2" charset="-78"/>
+                <a:cs typeface="Amiri" pitchFamily="2" charset="-78"/>
+              </a:rPr>
               <a:t>TOPIC CONVERSATION — Stretch. Examiner asks the questions in order and may add “لِمَاذَا؟ / هَلْ يُمْكِنُ أَنْ تَشْرَحَ أَكْثَرَ؟” to push for more. Candidate aims for a developed answer: opinion, balance, concession and a conditional.
 </a:t>
             </a:r>
@@ -1510,7 +1530,11 @@
           <a:lstStyle/>
           <a:p>
             <a:r>
-              <a:rPr lang="en-US" dirty="0"/>
+              <a:rPr lang="ar-SA" dirty="0">
+                <a:latin typeface="Amiri" pitchFamily="2" charset="-78"/>
+                <a:ea typeface="Amiri" pitchFamily="2" charset="-78"/>
+                <a:cs typeface="Amiri" pitchFamily="2" charset="-78"/>
+              </a:rPr>
               <a:t>WELCOME (1 min) — while students join.
 • Greet each student by name as they arrive: السَّلَامُ عَلَيْكُمْ. Take the register (Pastoral Tracker: attendance 0/1).
 • 2-MINUTE CHECK-IN (SEND training): a private chat to any student who seemed unsettled last lesson — “Are you okay today? 👍 / 👎”.
@@ -2224,7 +2248,11 @@
           <a:lstStyle/>
           <a:p>
             <a:r>
-              <a:rPr lang="en-US" dirty="0"/>
+              <a:rPr lang="ar-SA" dirty="0">
+                <a:latin typeface="Amiri" pitchFamily="2" charset="-78"/>
+                <a:ea typeface="Amiri" pitchFamily="2" charset="-78"/>
+                <a:cs typeface="Amiri" pitchFamily="2" charset="-78"/>
+              </a:rPr>
               <a:t>TEACH (3 min). Role play = precise and complete; conversation = develop. Choral repetition of the repair phrases. To a girl: تُعِيدِي.</a:t>
             </a:r>
             <a:endParaRPr lang="en-US" dirty="0"/>
@@ -2312,7 +2340,11 @@
           <a:lstStyle/>
           <a:p>
             <a:r>
-              <a:rPr lang="en-US" dirty="0"/>
+              <a:rPr lang="ar-SA" dirty="0">
+                <a:latin typeface="Amiri" pitchFamily="2" charset="-78"/>
+                <a:ea typeface="Amiri" pitchFamily="2" charset="-78"/>
+                <a:cs typeface="Amiri" pitchFamily="2" charset="-78"/>
+              </a:rPr>
               <a:t>LANGUAGE BANK (2 min) — measurements use the pronoun of the object: الطَّاوِلَةُ طُولُهَا مِتْرَانِ (dual!) · وَزْنُهُ ثَلَاثَةُ كِيلُوغْرَامَاتٍ. Shapes agree: صُنْدُوقٌ مُرَبَّعٌ · طَاوِلَةٌ دَائِرِيَّةٌ.</a:t>
             </a:r>
             <a:endParaRPr lang="en-US" dirty="0"/>
@@ -2400,7 +2432,11 @@
           <a:lstStyle/>
           <a:p>
             <a:r>
-              <a:rPr lang="en-US" dirty="0"/>
+              <a:rPr lang="ar-SA" dirty="0">
+                <a:latin typeface="Amiri" pitchFamily="2" charset="-78"/>
+                <a:ea typeface="Amiri" pitchFamily="2" charset="-78"/>
+                <a:cs typeface="Amiri" pitchFamily="2" charset="-78"/>
+              </a:rPr>
               <a:t>LANGUAGE BANK (2 min) — two ways: مَصْنُوعٌ مِنَ الخَشَبِ = خَشَبِيٌّ. The participle agrees: الكُرْسِيُّ مَصْنُوعٌ · الحَقِيبَةُ مَصْنُوعَةٌ · الأَكْيَاسُ مَصْنُوعَةٌ (non-human pl.). Buildings: مَبْنِيٌّ مِنَ الحَجَرِ.</a:t>
             </a:r>
             <a:endParaRPr lang="en-US" dirty="0"/>
@@ -2576,7 +2612,11 @@
           <a:lstStyle/>
           <a:p>
             <a:r>
-              <a:rPr lang="en-US" dirty="0"/>
+              <a:rPr lang="ar-SA" dirty="0">
+                <a:latin typeface="Amiri" pitchFamily="2" charset="-78"/>
+                <a:ea typeface="Amiri" pitchFamily="2" charset="-78"/>
+                <a:cs typeface="Amiri" pitchFamily="2" charset="-78"/>
+              </a:rPr>
               <a:t>ROLE PLAY A (Core) — lost property.
 SET-UP IN THE BREAKOUT ROOM: A = examiner (reads the left column ONLY — the questions, in order), B = candidate (sees the task column; Core may use the help column), C = observer (ticks the feedback checklist). 1 minute preparation, about 3 minutes speaking, 1 minute feedback, then rotate.
 Task ! is the unexpected question: in the exam the candidate has not seen it — the examiner should read it without warning.
@@ -2668,7 +2708,11 @@
           <a:lstStyle/>
           <a:p>
             <a:r>
-              <a:rPr lang="en-US" dirty="0"/>
+              <a:rPr lang="ar-SA" dirty="0">
+                <a:latin typeface="Amiri" pitchFamily="2" charset="-78"/>
+                <a:ea typeface="Amiri" pitchFamily="2" charset="-78"/>
+                <a:cs typeface="Amiri" pitchFamily="2" charset="-78"/>
+              </a:rPr>
               <a:t>ROLE PLAY B (Core+) — a furniture shop.
 SET-UP IN THE BREAKOUT ROOM: A = examiner (reads the left column ONLY — the questions, in order), B = candidate (sees the task column; Core may use the help column), C = observer (ticks the feedback checklist). 1 minute preparation, about 3 minutes speaking, 1 minute feedback, then rotate.
 Task ! is the unexpected question: in the exam the candidate has not seen it — the examiner should read it without warning.
@@ -3156,6 +3200,7 @@
                   <a:srgbClr val="D4AF37"/>
                 </a:solidFill>
                 <a:latin typeface="Amiri" pitchFamily="2" charset="-78"/>
+                <a:ea typeface="Amiri" pitchFamily="2" charset="-78"/>
                 <a:cs typeface="Amiri" pitchFamily="2" charset="-78"/>
               </a:rPr>
               <a:t>م</a:t>
@@ -3362,6 +3407,7 @@
                   <a:srgbClr val="D4AF37"/>
                 </a:solidFill>
                 <a:latin typeface="Amiri" pitchFamily="2" charset="-78"/>
+                <a:ea typeface="Amiri" pitchFamily="2" charset="-78"/>
                 <a:cs typeface="Amiri" pitchFamily="2" charset="-78"/>
               </a:rPr>
               <a:t>وَرْشَةُ التَّحَدُّثِ — المَقَايِيسُ وَالأَشْكَالُ</a:t>
@@ -3413,6 +3459,7 @@
                   <a:srgbClr val="C6D2E6"/>
                 </a:solidFill>
                 <a:latin typeface="Amiri" pitchFamily="2" charset="-78"/>
+                <a:ea typeface="Amiri" pitchFamily="2" charset="-78"/>
                 <a:cs typeface="Amiri" pitchFamily="2" charset="-78"/>
               </a:rPr>
               <a:t>طُولُهُ مِتْرَانِ</a:t>
@@ -3439,6 +3486,7 @@
                   <a:srgbClr val="C6D2E6"/>
                 </a:solidFill>
                 <a:latin typeface="Amiri" pitchFamily="2" charset="-78"/>
+                <a:ea typeface="Amiri" pitchFamily="2" charset="-78"/>
                 <a:cs typeface="Amiri" pitchFamily="2" charset="-78"/>
               </a:rPr>
               <a:t>مَصْنُوعٌ مِنَ الخَشَبِ</a:t>
@@ -3465,6 +3513,7 @@
                   <a:srgbClr val="C6D2E6"/>
                 </a:solidFill>
                 <a:latin typeface="Amiri" pitchFamily="2" charset="-78"/>
+                <a:ea typeface="Amiri" pitchFamily="2" charset="-78"/>
                 <a:cs typeface="Amiri" pitchFamily="2" charset="-78"/>
               </a:rPr>
               <a:t>شَكْلُهَا دَائِرِيٌّ</a:t>
@@ -3897,6 +3946,7 @@
                   <a:srgbClr val="D4AF37"/>
                 </a:solidFill>
                 <a:latin typeface="Amiri" pitchFamily="2" charset="-78"/>
+                <a:ea typeface="Amiri" pitchFamily="2" charset="-78"/>
                 <a:cs typeface="Amiri" pitchFamily="2" charset="-78"/>
               </a:rPr>
               <a:t>م</a:t>
@@ -4217,6 +4267,7 @@
                   <a:srgbClr val="8A6D1E"/>
                 </a:solidFill>
                 <a:latin typeface="Amiri" pitchFamily="2" charset="-78"/>
+                <a:ea typeface="Amiri" pitchFamily="2" charset="-78"/>
                 <a:cs typeface="Amiri" pitchFamily="2" charset="-78"/>
               </a:rPr>
               <a:t>تَصْمِيمُ مَقْعَدٍ لِلْمَدْرَسَةِ</a:t>
@@ -4497,6 +4548,7 @@
                   <a:srgbClr val="1B3B6F"/>
                 </a:solidFill>
                 <a:latin typeface="Amiri" pitchFamily="2" charset="-78"/>
+                <a:ea typeface="Amiri" pitchFamily="2" charset="-78"/>
                 <a:cs typeface="Amiri" pitchFamily="2" charset="-78"/>
               </a:rPr>
               <a:t>شَكْلُهُ … طُولُهُ … وَعَرْضُهُ …</a:t>
@@ -4573,6 +4625,7 @@
                   <a:srgbClr val="1B3B6F"/>
                 </a:solidFill>
                 <a:latin typeface="Amiri" pitchFamily="2" charset="-78"/>
+                <a:ea typeface="Amiri" pitchFamily="2" charset="-78"/>
                 <a:cs typeface="Amiri" pitchFamily="2" charset="-78"/>
               </a:rPr>
               <a:t>صِفْ لَنَا تَصْمِيمَكَ.</a:t>
@@ -4676,6 +4729,7 @@
                   <a:srgbClr val="1B3B6F"/>
                 </a:solidFill>
                 <a:latin typeface="Amiri" pitchFamily="2" charset="-78"/>
+                <a:ea typeface="Amiri" pitchFamily="2" charset="-78"/>
                 <a:cs typeface="Amiri" pitchFamily="2" charset="-78"/>
               </a:rPr>
               <a:t>مَصْنُوعٌ مِنْ … لِأَنَّ …</a:t>
@@ -4752,6 +4806,7 @@
                   <a:srgbClr val="1B3B6F"/>
                 </a:solidFill>
                 <a:latin typeface="Amiri" pitchFamily="2" charset="-78"/>
+                <a:ea typeface="Amiri" pitchFamily="2" charset="-78"/>
                 <a:cs typeface="Amiri" pitchFamily="2" charset="-78"/>
               </a:rPr>
               <a:t>مِمَّ هُوَ مَصْنُوعٌ؟</a:t>
@@ -4855,6 +4910,7 @@
                   <a:srgbClr val="1B3B6F"/>
                 </a:solidFill>
                 <a:latin typeface="Amiri" pitchFamily="2" charset="-78"/>
+                <a:ea typeface="Amiri" pitchFamily="2" charset="-78"/>
                 <a:cs typeface="Amiri" pitchFamily="2" charset="-78"/>
               </a:rPr>
               <a:t>لَاحَظْتُ أَنَّ … فَبَحَثْتُ …</a:t>
@@ -4931,6 +4987,7 @@
                   <a:srgbClr val="1B3B6F"/>
                 </a:solidFill>
                 <a:latin typeface="Amiri" pitchFamily="2" charset="-78"/>
+                <a:ea typeface="Amiri" pitchFamily="2" charset="-78"/>
                 <a:cs typeface="Amiri" pitchFamily="2" charset="-78"/>
               </a:rPr>
               <a:t>كَيْفَ جَاءَتْكَ الفِكْرَةُ؟</a:t>
@@ -5034,6 +5091,7 @@
                   <a:srgbClr val="1B3B6F"/>
                 </a:solidFill>
                 <a:latin typeface="Amiri" pitchFamily="2" charset="-78"/>
+                <a:ea typeface="Amiri" pitchFamily="2" charset="-78"/>
                 <a:cs typeface="Amiri" pitchFamily="2" charset="-78"/>
               </a:rPr>
               <a:t>سَيَكُونُ … لِكَيْ …</a:t>
@@ -5110,6 +5168,7 @@
                   <a:srgbClr val="1B3B6F"/>
                 </a:solidFill>
                 <a:latin typeface="Amiri" pitchFamily="2" charset="-78"/>
+                <a:ea typeface="Amiri" pitchFamily="2" charset="-78"/>
                 <a:cs typeface="Amiri" pitchFamily="2" charset="-78"/>
               </a:rPr>
               <a:t>وَمَا اللَّوْنُ؟</a:t>
@@ -5213,6 +5272,7 @@
                   <a:srgbClr val="1B3B6F"/>
                 </a:solidFill>
                 <a:latin typeface="Amiri" pitchFamily="2" charset="-78"/>
+                <a:ea typeface="Amiri" pitchFamily="2" charset="-78"/>
                 <a:cs typeface="Amiri" pitchFamily="2" charset="-78"/>
               </a:rPr>
               <a:t>سَيُكَلِّفُ … وَهُوَ أَ… مِنْ …</a:t>
@@ -5289,6 +5349,7 @@
                   <a:srgbClr val="1B3B6F"/>
                 </a:solidFill>
                 <a:latin typeface="Amiri" pitchFamily="2" charset="-78"/>
+                <a:ea typeface="Amiri" pitchFamily="2" charset="-78"/>
                 <a:cs typeface="Amiri" pitchFamily="2" charset="-78"/>
               </a:rPr>
               <a:t>كَمْ سَيُكَلِّفُ؟</a:t>
@@ -5498,6 +5559,7 @@
                   <a:srgbClr val="D4AF37"/>
                 </a:solidFill>
                 <a:latin typeface="Amiri" pitchFamily="2" charset="-78"/>
+                <a:ea typeface="Amiri" pitchFamily="2" charset="-78"/>
                 <a:cs typeface="Amiri" pitchFamily="2" charset="-78"/>
               </a:rPr>
               <a:t>م</a:t>
@@ -5818,6 +5880,7 @@
                   <a:srgbClr val="8A6D1E"/>
                 </a:solidFill>
                 <a:latin typeface="Amiri" pitchFamily="2" charset="-78"/>
+                <a:ea typeface="Amiri" pitchFamily="2" charset="-78"/>
                 <a:cs typeface="Amiri" pitchFamily="2" charset="-78"/>
               </a:rPr>
               <a:t>أَيُّ المَوَادِّ أَفْضَلُ لِلْبِيئَةِ؟</a:t>
@@ -6098,6 +6161,7 @@
                   <a:srgbClr val="1B3B6F"/>
                 </a:solidFill>
                 <a:latin typeface="Amiri" pitchFamily="2" charset="-78"/>
+                <a:ea typeface="Amiri" pitchFamily="2" charset="-78"/>
                 <a:cs typeface="Amiri" pitchFamily="2" charset="-78"/>
               </a:rPr>
               <a:t>أَرَى أَنَّ … لِأَنَّ … بَيْنَمَا …</a:t>
@@ -6174,6 +6238,7 @@
                   <a:srgbClr val="1B3B6F"/>
                 </a:solidFill>
                 <a:latin typeface="Amiri" pitchFamily="2" charset="-78"/>
+                <a:ea typeface="Amiri" pitchFamily="2" charset="-78"/>
                 <a:cs typeface="Amiri" pitchFamily="2" charset="-78"/>
               </a:rPr>
               <a:t>أَيُّ المَوَادِّ أَفْضَلُ لِلتَّغْلِيفِ فِي رَأْيِكَ؟</a:t>
@@ -6277,6 +6342,7 @@
                   <a:srgbClr val="1B3B6F"/>
                 </a:solidFill>
                 <a:latin typeface="Amiri" pitchFamily="2" charset="-78"/>
+                <a:ea typeface="Amiri" pitchFamily="2" charset="-78"/>
                 <a:cs typeface="Amiri" pitchFamily="2" charset="-78"/>
               </a:rPr>
               <a:t>صَحِيحٌ أَنَّهُ … غَيْرَ أَنَّ …</a:t>
@@ -6353,6 +6419,7 @@
                   <a:srgbClr val="1B3B6F"/>
                 </a:solidFill>
                 <a:latin typeface="Amiri" pitchFamily="2" charset="-78"/>
+                <a:ea typeface="Amiri" pitchFamily="2" charset="-78"/>
                 <a:cs typeface="Amiri" pitchFamily="2" charset="-78"/>
               </a:rPr>
               <a:t>لٰكِنَّ الزُّجَاجَ ثَقِيلٌ وَقَابِلٌ لِلْكَسْرِ!</a:t>
@@ -6456,6 +6523,7 @@
                   <a:srgbClr val="1B3B6F"/>
                 </a:solidFill>
                 <a:latin typeface="Amiri" pitchFamily="2" charset="-78"/>
+                <a:ea typeface="Amiri" pitchFamily="2" charset="-78"/>
                 <a:cs typeface="Amiri" pitchFamily="2" charset="-78"/>
               </a:rPr>
               <a:t>مِنْ نَاحِيَةٍ … وَمِنْ نَاحِيَةٍ أُخْرَى …</a:t>
@@ -6532,6 +6600,7 @@
                   <a:srgbClr val="1B3B6F"/>
                 </a:solidFill>
                 <a:latin typeface="Amiri" pitchFamily="2" charset="-78"/>
+                <a:ea typeface="Amiri" pitchFamily="2" charset="-78"/>
                 <a:cs typeface="Amiri" pitchFamily="2" charset="-78"/>
               </a:rPr>
               <a:t>وَمَاذَا عَنِ الخَشَبِ؟</a:t>
@@ -6635,6 +6704,7 @@
                   <a:srgbClr val="1B3B6F"/>
                 </a:solidFill>
                 <a:latin typeface="Amiri" pitchFamily="2" charset="-78"/>
+                <a:ea typeface="Amiri" pitchFamily="2" charset="-78"/>
                 <a:cs typeface="Amiri" pitchFamily="2" charset="-78"/>
               </a:rPr>
               <a:t>نَعَمْ، اسْتَبْدَلْنَا … بِأَكْوَابٍ … فَقَلَّتْ …</a:t>
@@ -6711,6 +6781,7 @@
                   <a:srgbClr val="1B3B6F"/>
                 </a:solidFill>
                 <a:latin typeface="Amiri" pitchFamily="2" charset="-78"/>
+                <a:ea typeface="Amiri" pitchFamily="2" charset="-78"/>
                 <a:cs typeface="Amiri" pitchFamily="2" charset="-78"/>
               </a:rPr>
               <a:t>هَلْ جَرَّبْتُمْ شَيْئًا فِي مَدْرَسَتِكُمْ؟</a:t>
@@ -6814,6 +6885,7 @@
                   <a:srgbClr val="1B3B6F"/>
                 </a:solidFill>
                 <a:latin typeface="Amiri" pitchFamily="2" charset="-78"/>
+                <a:ea typeface="Amiri" pitchFamily="2" charset="-78"/>
                 <a:cs typeface="Amiri" pitchFamily="2" charset="-78"/>
               </a:rPr>
               <a:t>لَوِ اخْتَرَعْتُ …، لَكَانَتْ …</a:t>
@@ -6890,6 +6962,7 @@
                   <a:srgbClr val="1B3B6F"/>
                 </a:solidFill>
                 <a:latin typeface="Amiri" pitchFamily="2" charset="-78"/>
+                <a:ea typeface="Amiri" pitchFamily="2" charset="-78"/>
                 <a:cs typeface="Amiri" pitchFamily="2" charset="-78"/>
               </a:rPr>
               <a:t>لَوِ اخْتَرَعْتَ مَادَّةً جَدِيدَةً، كَيْفَ تَكُونُ؟</a:t>
@@ -7099,6 +7172,7 @@
                   <a:srgbClr val="D4AF37"/>
                 </a:solidFill>
                 <a:latin typeface="Amiri" pitchFamily="2" charset="-78"/>
+                <a:ea typeface="Amiri" pitchFamily="2" charset="-78"/>
                 <a:cs typeface="Amiri" pitchFamily="2" charset="-78"/>
               </a:rPr>
               <a:t>م</a:t>
@@ -7419,6 +7493,7 @@
                   <a:srgbClr val="8A6D1E"/>
                 </a:solidFill>
                 <a:latin typeface="Amiri" pitchFamily="2" charset="-78"/>
+                <a:ea typeface="Amiri" pitchFamily="2" charset="-78"/>
                 <a:cs typeface="Amiri" pitchFamily="2" charset="-78"/>
               </a:rPr>
               <a:t>وَرَقَةُ المُلَاحِظِ</a:t>
@@ -8889,6 +8964,7 @@
                   <a:srgbClr val="D4AF37"/>
                 </a:solidFill>
                 <a:latin typeface="Amiri" pitchFamily="2" charset="-78"/>
+                <a:ea typeface="Amiri" pitchFamily="2" charset="-78"/>
                 <a:cs typeface="Amiri" pitchFamily="2" charset="-78"/>
               </a:rPr>
               <a:t>م</a:t>
@@ -9209,6 +9285,7 @@
                   <a:srgbClr val="8A6D1E"/>
                 </a:solidFill>
                 <a:latin typeface="Amiri" pitchFamily="2" charset="-78"/>
+                <a:ea typeface="Amiri" pitchFamily="2" charset="-78"/>
                 <a:cs typeface="Amiri" pitchFamily="2" charset="-78"/>
               </a:rPr>
               <a:t>نَمُوذَجُ الإِجَابَةِ</a:t>
@@ -9451,6 +9528,7 @@
                   <a:srgbClr val="1B3B6F"/>
                 </a:solidFill>
                 <a:latin typeface="Amiri" pitchFamily="2" charset="-78"/>
+                <a:ea typeface="Amiri" pitchFamily="2" charset="-78"/>
                 <a:cs typeface="Amiri" pitchFamily="2" charset="-78"/>
               </a:rPr>
               <a:t>فَقَدْتُ حَقِيبَةَ ظَهْرٍ.</a:t>
@@ -9527,6 +9605,7 @@
                   <a:srgbClr val="1B3B6F"/>
                 </a:solidFill>
                 <a:latin typeface="Amiri" pitchFamily="2" charset="-78"/>
+                <a:ea typeface="Amiri" pitchFamily="2" charset="-78"/>
                 <a:cs typeface="Amiri" pitchFamily="2" charset="-78"/>
               </a:rPr>
               <a:t>مَسَاءَ الخَيْرِ، مَاذَا فَقَدْتَ؟</a:t>
@@ -9630,6 +9709,7 @@
                   <a:srgbClr val="1B3B6F"/>
                 </a:solidFill>
                 <a:latin typeface="Amiri" pitchFamily="2" charset="-78"/>
+                <a:ea typeface="Amiri" pitchFamily="2" charset="-78"/>
                 <a:cs typeface="Amiri" pitchFamily="2" charset="-78"/>
               </a:rPr>
               <a:t>لَوْنُهَا أَخْضَرُ دَاكِنٌ.</a:t>
@@ -9706,6 +9786,7 @@
                   <a:srgbClr val="1B3B6F"/>
                 </a:solidFill>
                 <a:latin typeface="Amiri" pitchFamily="2" charset="-78"/>
+                <a:ea typeface="Amiri" pitchFamily="2" charset="-78"/>
                 <a:cs typeface="Amiri" pitchFamily="2" charset="-78"/>
               </a:rPr>
               <a:t>مَا لَوْنُهَا؟</a:t>
@@ -9809,6 +9890,7 @@
                   <a:srgbClr val="1B3B6F"/>
                 </a:solidFill>
                 <a:latin typeface="Amiri" pitchFamily="2" charset="-78"/>
+                <a:ea typeface="Amiri" pitchFamily="2" charset="-78"/>
                 <a:cs typeface="Amiri" pitchFamily="2" charset="-78"/>
               </a:rPr>
               <a:t>هِيَ مُتَوَسِّطَةٌ، ارْتِفَاعُهَا خَمْسُونَ سَنْتِيمِتْرًا تَقْرِيبًا.</a:t>
@@ -9885,6 +9967,7 @@
                   <a:srgbClr val="1B3B6F"/>
                 </a:solidFill>
                 <a:latin typeface="Amiri" pitchFamily="2" charset="-78"/>
+                <a:ea typeface="Amiri" pitchFamily="2" charset="-78"/>
                 <a:cs typeface="Amiri" pitchFamily="2" charset="-78"/>
               </a:rPr>
               <a:t>هَلْ هِيَ كَبِيرَةٌ؟</a:t>
@@ -9988,6 +10071,7 @@
                   <a:srgbClr val="1B3B6F"/>
                 </a:solidFill>
                 <a:latin typeface="Amiri" pitchFamily="2" charset="-78"/>
+                <a:ea typeface="Amiri" pitchFamily="2" charset="-78"/>
                 <a:cs typeface="Amiri" pitchFamily="2" charset="-78"/>
               </a:rPr>
               <a:t>هِيَ مَصْنُوعَةٌ مِنَ القُمَاشِ.</a:t>
@@ -10064,6 +10148,7 @@
                   <a:srgbClr val="1B3B6F"/>
                 </a:solidFill>
                 <a:latin typeface="Amiri" pitchFamily="2" charset="-78"/>
+                <a:ea typeface="Amiri" pitchFamily="2" charset="-78"/>
                 <a:cs typeface="Amiri" pitchFamily="2" charset="-78"/>
               </a:rPr>
               <a:t>مِمَّ هِيَ مَصْنُوعَةٌ؟</a:t>
@@ -10167,6 +10252,7 @@
                   <a:srgbClr val="1B3B6F"/>
                 </a:solidFill>
                 <a:latin typeface="Amiri" pitchFamily="2" charset="-78"/>
+                <a:ea typeface="Amiri" pitchFamily="2" charset="-78"/>
                 <a:cs typeface="Amiri" pitchFamily="2" charset="-78"/>
               </a:rPr>
               <a:t>كَانَ فِيهَا حَاسُوبٌ وَكِتَابَانِ.</a:t>
@@ -10243,6 +10329,7 @@
                   <a:srgbClr val="1B3B6F"/>
                 </a:solidFill>
                 <a:latin typeface="Amiri" pitchFamily="2" charset="-78"/>
+                <a:ea typeface="Amiri" pitchFamily="2" charset="-78"/>
                 <a:cs typeface="Amiri" pitchFamily="2" charset="-78"/>
               </a:rPr>
               <a:t>مَاذَا كَانَ فِيهَا؟</a:t>
@@ -10452,6 +10539,7 @@
                   <a:srgbClr val="D4AF37"/>
                 </a:solidFill>
                 <a:latin typeface="Amiri" pitchFamily="2" charset="-78"/>
+                <a:ea typeface="Amiri" pitchFamily="2" charset="-78"/>
                 <a:cs typeface="Amiri" pitchFamily="2" charset="-78"/>
               </a:rPr>
               <a:t>م</a:t>
@@ -10772,6 +10860,7 @@
                   <a:srgbClr val="8A6D1E"/>
                 </a:solidFill>
                 <a:latin typeface="Amiri" pitchFamily="2" charset="-78"/>
+                <a:ea typeface="Amiri" pitchFamily="2" charset="-78"/>
                 <a:cs typeface="Amiri" pitchFamily="2" charset="-78"/>
               </a:rPr>
               <a:t>نَمُوذَجُ الإِجَابَةِ</a:t>
@@ -11014,6 +11103,7 @@
                   <a:srgbClr val="1B3B6F"/>
                 </a:solidFill>
                 <a:latin typeface="Amiri" pitchFamily="2" charset="-78"/>
+                <a:ea typeface="Amiri" pitchFamily="2" charset="-78"/>
                 <a:cs typeface="Amiri" pitchFamily="2" charset="-78"/>
               </a:rPr>
               <a:t>أُرِيدُ مَكْتَبًا صَغِيرًا لِغُرْفَتِي.</a:t>
@@ -11090,6 +11180,7 @@
                   <a:srgbClr val="1B3B6F"/>
                 </a:solidFill>
                 <a:latin typeface="Amiri" pitchFamily="2" charset="-78"/>
+                <a:ea typeface="Amiri" pitchFamily="2" charset="-78"/>
                 <a:cs typeface="Amiri" pitchFamily="2" charset="-78"/>
               </a:rPr>
               <a:t>أَهْلًا، كَيْفَ أُسَاعِدُكَ؟</a:t>
@@ -11193,6 +11284,7 @@
                   <a:srgbClr val="1B3B6F"/>
                 </a:solidFill>
                 <a:latin typeface="Amiri" pitchFamily="2" charset="-78"/>
+                <a:ea typeface="Amiri" pitchFamily="2" charset="-78"/>
                 <a:cs typeface="Amiri" pitchFamily="2" charset="-78"/>
               </a:rPr>
               <a:t>كَمْ طُولُهُ مِنْ فَضْلِكَ؟</a:t>
@@ -11269,6 +11361,7 @@
                   <a:srgbClr val="1B3B6F"/>
                 </a:solidFill>
                 <a:latin typeface="Amiri" pitchFamily="2" charset="-78"/>
+                <a:ea typeface="Amiri" pitchFamily="2" charset="-78"/>
                 <a:cs typeface="Amiri" pitchFamily="2" charset="-78"/>
               </a:rPr>
               <a:t>هٰذَا المَكْتَبُ مُمْتَازٌ.</a:t>
@@ -11372,6 +11465,7 @@
                   <a:srgbClr val="1B3B6F"/>
                 </a:solidFill>
                 <a:latin typeface="Amiri" pitchFamily="2" charset="-78"/>
+                <a:ea typeface="Amiri" pitchFamily="2" charset="-78"/>
                 <a:cs typeface="Amiri" pitchFamily="2" charset="-78"/>
               </a:rPr>
               <a:t>هٰذَا طَوِيلٌ قَلِيلًا، لِأَنَّ الجِدَارَ فِي غُرْفَتِي طُولُهُ مِتْرٌ وَاحِدٌ فَقَطْ.</a:t>
@@ -11448,6 +11542,7 @@
                   <a:srgbClr val="1B3B6F"/>
                 </a:solidFill>
                 <a:latin typeface="Amiri" pitchFamily="2" charset="-78"/>
+                <a:ea typeface="Amiri" pitchFamily="2" charset="-78"/>
                 <a:cs typeface="Amiri" pitchFamily="2" charset="-78"/>
               </a:rPr>
               <a:t>طُولُهُ مِتْرٌ وَنِصْفٌ.</a:t>
@@ -11551,6 +11646,7 @@
                   <a:srgbClr val="1B3B6F"/>
                 </a:solidFill>
                 <a:latin typeface="Amiri" pitchFamily="2" charset="-78"/>
+                <a:ea typeface="Amiri" pitchFamily="2" charset="-78"/>
                 <a:cs typeface="Amiri" pitchFamily="2" charset="-78"/>
               </a:rPr>
               <a:t>مِمَّ هُوَ مَصْنُوعٌ؟ وَهَلْ هُوَ ثَقِيلٌ؟</a:t>
@@ -11627,6 +11723,7 @@
                   <a:srgbClr val="1B3B6F"/>
                 </a:solidFill>
                 <a:latin typeface="Amiri" pitchFamily="2" charset="-78"/>
+                <a:ea typeface="Amiri" pitchFamily="2" charset="-78"/>
                 <a:cs typeface="Amiri" pitchFamily="2" charset="-78"/>
               </a:rPr>
               <a:t>عِنْدَنَا هٰذَا: طُولُهُ تِسْعُونَ سَنْتِيمِتْرًا.</a:t>
@@ -11730,6 +11827,7 @@
                   <a:srgbClr val="1B3B6F"/>
                 </a:solidFill>
                 <a:latin typeface="Amiri" pitchFamily="2" charset="-78"/>
+                <a:ea typeface="Amiri" pitchFamily="2" charset="-78"/>
                 <a:cs typeface="Amiri" pitchFamily="2" charset="-78"/>
               </a:rPr>
               <a:t>نَعَمْ، لِأَنَّهُ أَثْقَلُ مِنْ أَنْ أَحْمِلَهُ فِي الحَافِلَةِ!</a:t>
@@ -11809,6 +11907,7 @@
                   <a:srgbClr val="1B3B6F"/>
                 </a:solidFill>
                 <a:latin typeface="Amiri" pitchFamily="2" charset="-78"/>
+                <a:ea typeface="Amiri" pitchFamily="2" charset="-78"/>
                 <a:cs typeface="Amiri" pitchFamily="2" charset="-78"/>
               </a:rPr>
               <a:t>مِنَ الخَشَبِ، وَوَزْنُهُ عِشْرُونَ كِيلُوغْرَامًا. هَلْ تُرِيدُ التَّوْصِيلَ؟</a:t>
@@ -12018,6 +12117,7 @@
                   <a:srgbClr val="D4AF37"/>
                 </a:solidFill>
                 <a:latin typeface="Amiri" pitchFamily="2" charset="-78"/>
+                <a:ea typeface="Amiri" pitchFamily="2" charset="-78"/>
                 <a:cs typeface="Amiri" pitchFamily="2" charset="-78"/>
               </a:rPr>
               <a:t>م</a:t>
@@ -12338,6 +12438,7 @@
                   <a:srgbClr val="8A6D1E"/>
                 </a:solidFill>
                 <a:latin typeface="Amiri" pitchFamily="2" charset="-78"/>
+                <a:ea typeface="Amiri" pitchFamily="2" charset="-78"/>
                 <a:cs typeface="Amiri" pitchFamily="2" charset="-78"/>
               </a:rPr>
               <a:t>نَمُوذَجُ الإِجَابَةِ</a:t>
@@ -12580,6 +12681,7 @@
                   <a:srgbClr val="1B3B6F"/>
                 </a:solidFill>
                 <a:latin typeface="Amiri" pitchFamily="2" charset="-78"/>
+                <a:ea typeface="Amiri" pitchFamily="2" charset="-78"/>
                 <a:cs typeface="Amiri" pitchFamily="2" charset="-78"/>
               </a:rPr>
               <a:t>شَكْلُهُ نِصْفُ دَائِرَةٍ، طُولُهُ ثَلَاثَةُ أَمْتَارٍ، وَعَرْضُهُ نِصْفُ مِتْرٍ، فَيَجْلِسُ عَلَيْهِ سِتَّةُ طُلَّابٍ.</a:t>
@@ -12656,6 +12758,7 @@
                   <a:srgbClr val="1B3B6F"/>
                 </a:solidFill>
                 <a:latin typeface="Amiri" pitchFamily="2" charset="-78"/>
+                <a:ea typeface="Amiri" pitchFamily="2" charset="-78"/>
                 <a:cs typeface="Amiri" pitchFamily="2" charset="-78"/>
               </a:rPr>
               <a:t>صِفْ لَنَا تَصْمِيمَكَ.</a:t>
@@ -12759,6 +12862,7 @@
                   <a:srgbClr val="1B3B6F"/>
                 </a:solidFill>
                 <a:latin typeface="Amiri" pitchFamily="2" charset="-78"/>
+                <a:ea typeface="Amiri" pitchFamily="2" charset="-78"/>
                 <a:cs typeface="Amiri" pitchFamily="2" charset="-78"/>
               </a:rPr>
               <a:t>المَقْعَدُ مَصْنُوعٌ مِنْ بْلَاسْتِيكٍ مُعَادِ التَّدْوِيرِ، وَأَرْجُلُهُ مَعْدِنِيَّةٌ، لِأَنَّهُمَا لَا يَتَأَثَّرَانِ بِالمَطَرِ.</a:t>
@@ -12835,6 +12939,7 @@
                   <a:srgbClr val="1B3B6F"/>
                 </a:solidFill>
                 <a:latin typeface="Amiri" pitchFamily="2" charset="-78"/>
+                <a:ea typeface="Amiri" pitchFamily="2" charset="-78"/>
                 <a:cs typeface="Amiri" pitchFamily="2" charset="-78"/>
               </a:rPr>
               <a:t>مِمَّ هُوَ مَصْنُوعٌ؟</a:t>
@@ -12938,6 +13043,7 @@
                   <a:srgbClr val="1B3B6F"/>
                 </a:solidFill>
                 <a:latin typeface="Amiri" pitchFamily="2" charset="-78"/>
+                <a:ea typeface="Amiri" pitchFamily="2" charset="-78"/>
                 <a:cs typeface="Amiri" pitchFamily="2" charset="-78"/>
               </a:rPr>
               <a:t>لَاحَظْتُ أَنَّ المَقَاعِدَ الخَشَبِيَّةَ القَدِيمَةَ تَتَكَسَّرُ بَعْدَ كُلِّ شِتَاءٍ، فَبَحَثْتُ عَنْ مَوَادَّ أَقْوَى.</a:t>
@@ -13014,6 +13120,7 @@
                   <a:srgbClr val="1B3B6F"/>
                 </a:solidFill>
                 <a:latin typeface="Amiri" pitchFamily="2" charset="-78"/>
+                <a:ea typeface="Amiri" pitchFamily="2" charset="-78"/>
                 <a:cs typeface="Amiri" pitchFamily="2" charset="-78"/>
               </a:rPr>
               <a:t>كَيْفَ جَاءَتْكَ الفِكْرَةُ؟</a:t>
@@ -13117,6 +13224,7 @@
                   <a:srgbClr val="1B3B6F"/>
                 </a:solidFill>
                 <a:latin typeface="Amiri" pitchFamily="2" charset="-78"/>
+                <a:ea typeface="Amiri" pitchFamily="2" charset="-78"/>
                 <a:cs typeface="Amiri" pitchFamily="2" charset="-78"/>
               </a:rPr>
               <a:t>سَيَكُونُ أَخْضَرَ فَاتِحًا، لِكَيْ يَنْسَجِمَ مَعَ الأَشْجَارِ فِي المَلْعَبِ.</a:t>
@@ -13193,6 +13301,7 @@
                   <a:srgbClr val="1B3B6F"/>
                 </a:solidFill>
                 <a:latin typeface="Amiri" pitchFamily="2" charset="-78"/>
+                <a:ea typeface="Amiri" pitchFamily="2" charset="-78"/>
                 <a:cs typeface="Amiri" pitchFamily="2" charset="-78"/>
               </a:rPr>
               <a:t>وَمَا اللَّوْنُ؟</a:t>
@@ -13296,6 +13405,7 @@
                   <a:srgbClr val="1B3B6F"/>
                 </a:solidFill>
                 <a:latin typeface="Amiri" pitchFamily="2" charset="-78"/>
+                <a:ea typeface="Amiri" pitchFamily="2" charset="-78"/>
                 <a:cs typeface="Amiri" pitchFamily="2" charset="-78"/>
               </a:rPr>
               <a:t>سَيُكَلِّفُ مِئَتَيْ جُنَيْهٍ تَقْرِيبًا، وَهُوَ أَغْلَى مِنَ الخَشَبِيِّ، لٰكِنَّهُ سَيَدُومُ عِشْرِينَ سَنَةً.</a:t>
@@ -13372,6 +13482,7 @@
                   <a:srgbClr val="1B3B6F"/>
                 </a:solidFill>
                 <a:latin typeface="Amiri" pitchFamily="2" charset="-78"/>
+                <a:ea typeface="Amiri" pitchFamily="2" charset="-78"/>
                 <a:cs typeface="Amiri" pitchFamily="2" charset="-78"/>
               </a:rPr>
               <a:t>كَمْ سَيُكَلِّفُ؟</a:t>
@@ -13581,6 +13692,7 @@
                   <a:srgbClr val="D4AF37"/>
                 </a:solidFill>
                 <a:latin typeface="Amiri" pitchFamily="2" charset="-78"/>
+                <a:ea typeface="Amiri" pitchFamily="2" charset="-78"/>
                 <a:cs typeface="Amiri" pitchFamily="2" charset="-78"/>
               </a:rPr>
               <a:t>م</a:t>
@@ -13901,6 +14013,7 @@
                   <a:srgbClr val="8A6D1E"/>
                 </a:solidFill>
                 <a:latin typeface="Amiri" pitchFamily="2" charset="-78"/>
+                <a:ea typeface="Amiri" pitchFamily="2" charset="-78"/>
                 <a:cs typeface="Amiri" pitchFamily="2" charset="-78"/>
               </a:rPr>
               <a:t>نَمُوذَجُ الإِجَابَةِ</a:t>
@@ -14143,6 +14256,7 @@
                   <a:srgbClr val="1B3B6F"/>
                 </a:solidFill>
                 <a:latin typeface="Amiri" pitchFamily="2" charset="-78"/>
+                <a:ea typeface="Amiri" pitchFamily="2" charset="-78"/>
                 <a:cs typeface="Amiri" pitchFamily="2" charset="-78"/>
               </a:rPr>
               <a:t>أَرَى أَنَّ الزُّجَاجَ أَفْضَلُ، لِأَنَّهُ يُعَادُ تَدْوِيرُهُ مَرَّاتٍ لَا تُحْصَى، بَيْنَمَا يَبْقَى البْلَاسْتِيكُ فِي الأَرْضِ مِئَاتِ السِّنِينَ.</a:t>
@@ -14219,6 +14333,7 @@
                   <a:srgbClr val="1B3B6F"/>
                 </a:solidFill>
                 <a:latin typeface="Amiri" pitchFamily="2" charset="-78"/>
+                <a:ea typeface="Amiri" pitchFamily="2" charset="-78"/>
                 <a:cs typeface="Amiri" pitchFamily="2" charset="-78"/>
               </a:rPr>
               <a:t>أَيُّ المَوَادِّ أَفْضَلُ لِلتَّغْلِيفِ فِي رَأْيِكَ؟</a:t>
@@ -14322,6 +14437,7 @@
                   <a:srgbClr val="1B3B6F"/>
                 </a:solidFill>
                 <a:latin typeface="Amiri" pitchFamily="2" charset="-78"/>
+                <a:ea typeface="Amiri" pitchFamily="2" charset="-78"/>
                 <a:cs typeface="Amiri" pitchFamily="2" charset="-78"/>
               </a:rPr>
               <a:t>صَحِيحٌ أَنَّهُ أَثْقَلُ، مِمَّا يَزِيدُ تَكْلِفَةَ النَّقْلِ، غَيْرَ أَنَّ الزُّجَاجَاتِ يُمْكِنُ أَنْ تُغْسَلَ وَتُسْتَعْمَلَ عَشَرَاتِ المَرَّاتِ.</a:t>
@@ -14398,6 +14514,7 @@
                   <a:srgbClr val="1B3B6F"/>
                 </a:solidFill>
                 <a:latin typeface="Amiri" pitchFamily="2" charset="-78"/>
+                <a:ea typeface="Amiri" pitchFamily="2" charset="-78"/>
                 <a:cs typeface="Amiri" pitchFamily="2" charset="-78"/>
               </a:rPr>
               <a:t>لٰكِنَّ الزُّجَاجَ ثَقِيلٌ وَقَابِلٌ لِلْكَسْرِ!</a:t>
@@ -14501,6 +14618,7 @@
                   <a:srgbClr val="1B3B6F"/>
                 </a:solidFill>
                 <a:latin typeface="Amiri" pitchFamily="2" charset="-78"/>
+                <a:ea typeface="Amiri" pitchFamily="2" charset="-78"/>
                 <a:cs typeface="Amiri" pitchFamily="2" charset="-78"/>
               </a:rPr>
               <a:t>مِنْ نَاحِيَةٍ، الخَشَبُ مَادَّةٌ طَبِيعِيَّةٌ مُتَجَدِّدَةٌ، وَمِنْ نَاحِيَةٍ أُخْرَى، إِذَا قُطِعَتِ الأَشْجَارُ دُونَ زِرَاعَةِ غَيْرِهَا، فَسَنَخْسَرُ الغَابَاتِ.</a:t>
@@ -14577,6 +14695,7 @@
                   <a:srgbClr val="1B3B6F"/>
                 </a:solidFill>
                 <a:latin typeface="Amiri" pitchFamily="2" charset="-78"/>
+                <a:ea typeface="Amiri" pitchFamily="2" charset="-78"/>
                 <a:cs typeface="Amiri" pitchFamily="2" charset="-78"/>
               </a:rPr>
               <a:t>وَمَاذَا عَنِ الخَشَبِ؟</a:t>
@@ -14680,6 +14799,7 @@
                   <a:srgbClr val="1B3B6F"/>
                 </a:solidFill>
                 <a:latin typeface="Amiri" pitchFamily="2" charset="-78"/>
+                <a:ea typeface="Amiri" pitchFamily="2" charset="-78"/>
                 <a:cs typeface="Amiri" pitchFamily="2" charset="-78"/>
               </a:rPr>
               <a:t>نَعَمْ، اسْتَبْدَلْنَا الأَكْوَابَ البْلَاسْتِيكِيَّةَ بِأَكْوَابٍ مَعْدِنِيَّةٍ، فَقَلَّتِ النُّفَايَاتُ بِمِقْدَارِ ثَلَاثِينَ كِيلُوغْرَامًا كُلَّ شَهْرٍ.</a:t>
@@ -14756,6 +14876,7 @@
                   <a:srgbClr val="1B3B6F"/>
                 </a:solidFill>
                 <a:latin typeface="Amiri" pitchFamily="2" charset="-78"/>
+                <a:ea typeface="Amiri" pitchFamily="2" charset="-78"/>
                 <a:cs typeface="Amiri" pitchFamily="2" charset="-78"/>
               </a:rPr>
               <a:t>هَلْ جَرَّبْتُمْ شَيْئًا فِي مَدْرَسَتِكُمْ؟</a:t>
@@ -14859,6 +14980,7 @@
                   <a:srgbClr val="1B3B6F"/>
                 </a:solidFill>
                 <a:latin typeface="Amiri" pitchFamily="2" charset="-78"/>
+                <a:ea typeface="Amiri" pitchFamily="2" charset="-78"/>
                 <a:cs typeface="Amiri" pitchFamily="2" charset="-78"/>
               </a:rPr>
               <a:t>لَوِ اخْتَرَعْتُ مَادَّةً جَدِيدَةً، لَكَانَتْ خَفِيفَةً كَالبْلَاسْتِيكِ، وَقَوِيَّةً كَالمَعْدِنِ، وَتَتَحَلَّلُ فِي التُّرْبَةِ كَأَوْرَاقِ الشَّجَرِ.</a:t>
@@ -14935,6 +15057,7 @@
                   <a:srgbClr val="1B3B6F"/>
                 </a:solidFill>
                 <a:latin typeface="Amiri" pitchFamily="2" charset="-78"/>
+                <a:ea typeface="Amiri" pitchFamily="2" charset="-78"/>
                 <a:cs typeface="Amiri" pitchFamily="2" charset="-78"/>
               </a:rPr>
               <a:t>لَوِ اخْتَرَعْتَ مَادَّةً جَدِيدَةً، كَيْفَ تَكُونُ؟</a:t>
@@ -15144,6 +15267,7 @@
                   <a:srgbClr val="D4AF37"/>
                 </a:solidFill>
                 <a:latin typeface="Amiri" pitchFamily="2" charset="-78"/>
+                <a:ea typeface="Amiri" pitchFamily="2" charset="-78"/>
                 <a:cs typeface="Amiri" pitchFamily="2" charset="-78"/>
               </a:rPr>
               <a:t>م</a:t>
@@ -15464,6 +15588,7 @@
                   <a:srgbClr val="8A6D1E"/>
                 </a:solidFill>
                 <a:latin typeface="Amiri" pitchFamily="2" charset="-78"/>
+                <a:ea typeface="Amiri" pitchFamily="2" charset="-78"/>
                 <a:cs typeface="Amiri" pitchFamily="2" charset="-78"/>
               </a:rPr>
               <a:t>الأَشْيَاءُ حَوْلِي</a:t>
@@ -15744,6 +15869,7 @@
                   <a:srgbClr val="1B3B6F"/>
                 </a:solidFill>
                 <a:latin typeface="Amiri" pitchFamily="2" charset="-78"/>
+                <a:ea typeface="Amiri" pitchFamily="2" charset="-78"/>
                 <a:cs typeface="Amiri" pitchFamily="2" charset="-78"/>
               </a:rPr>
               <a:t>حَقِيبَتِي … لَوْنُهَا … وَهِيَ مَصْنُوعَةٌ مِنْ …</a:t>
@@ -15820,6 +15946,7 @@
                   <a:srgbClr val="1B3B6F"/>
                 </a:solidFill>
                 <a:latin typeface="Amiri" pitchFamily="2" charset="-78"/>
+                <a:ea typeface="Amiri" pitchFamily="2" charset="-78"/>
                 <a:cs typeface="Amiri" pitchFamily="2" charset="-78"/>
               </a:rPr>
               <a:t>صِفْ حَقِيبَتَكَ المَدْرَسِيَّةَ.</a:t>
@@ -15988,6 +16115,7 @@
                   <a:srgbClr val="1B3B6F"/>
                 </a:solidFill>
                 <a:latin typeface="Amiri" pitchFamily="2" charset="-78"/>
+                <a:ea typeface="Amiri" pitchFamily="2" charset="-78"/>
                 <a:cs typeface="Amiri" pitchFamily="2" charset="-78"/>
               </a:rPr>
               <a:t>طَاوِلَتُنَا …</a:t>
@@ -16064,6 +16192,7 @@
                   <a:srgbClr val="1B3B6F"/>
                 </a:solidFill>
                 <a:latin typeface="Amiri" pitchFamily="2" charset="-78"/>
+                <a:ea typeface="Amiri" pitchFamily="2" charset="-78"/>
                 <a:cs typeface="Amiri" pitchFamily="2" charset="-78"/>
               </a:rPr>
               <a:t>مَا شَكْلُ طَاوِلَةِ المَطْبَخِ فِي بَيْتِكَ؟</a:t>
@@ -16232,6 +16361,7 @@
                   <a:srgbClr val="1B3B6F"/>
                 </a:solidFill>
                 <a:latin typeface="Amiri" pitchFamily="2" charset="-78"/>
+                <a:ea typeface="Amiri" pitchFamily="2" charset="-78"/>
                 <a:cs typeface="Amiri" pitchFamily="2" charset="-78"/>
               </a:rPr>
               <a:t>طُولِي …</a:t>
@@ -16308,6 +16438,7 @@
                   <a:srgbClr val="1B3B6F"/>
                 </a:solidFill>
                 <a:latin typeface="Amiri" pitchFamily="2" charset="-78"/>
+                <a:ea typeface="Amiri" pitchFamily="2" charset="-78"/>
                 <a:cs typeface="Amiri" pitchFamily="2" charset="-78"/>
               </a:rPr>
               <a:t>كَمْ طُولُكَ؟</a:t>
@@ -16476,6 +16607,7 @@
                   <a:srgbClr val="1B3B6F"/>
                 </a:solidFill>
                 <a:latin typeface="Amiri" pitchFamily="2" charset="-78"/>
+                <a:ea typeface="Amiri" pitchFamily="2" charset="-78"/>
                 <a:cs typeface="Amiri" pitchFamily="2" charset="-78"/>
               </a:rPr>
               <a:t>هَاتِفِي مَصْنُوعٌ مِنْ …</a:t>
@@ -16552,6 +16684,7 @@
                   <a:srgbClr val="1B3B6F"/>
                 </a:solidFill>
                 <a:latin typeface="Amiri" pitchFamily="2" charset="-78"/>
+                <a:ea typeface="Amiri" pitchFamily="2" charset="-78"/>
                 <a:cs typeface="Amiri" pitchFamily="2" charset="-78"/>
               </a:rPr>
               <a:t>مِمَّ هَاتِفُكَ مَصْنُوعٌ؟</a:t>
@@ -16720,6 +16853,7 @@
                   <a:srgbClr val="1B3B6F"/>
                 </a:solidFill>
                 <a:latin typeface="Amiri" pitchFamily="2" charset="-78"/>
+                <a:ea typeface="Amiri" pitchFamily="2" charset="-78"/>
                 <a:cs typeface="Amiri" pitchFamily="2" charset="-78"/>
               </a:rPr>
               <a:t>أُحِبُّ … لِأَنَّهَا …</a:t>
@@ -16796,6 +16930,7 @@
                   <a:srgbClr val="1B3B6F"/>
                 </a:solidFill>
                 <a:latin typeface="Amiri" pitchFamily="2" charset="-78"/>
+                <a:ea typeface="Amiri" pitchFamily="2" charset="-78"/>
                 <a:cs typeface="Amiri" pitchFamily="2" charset="-78"/>
               </a:rPr>
               <a:t>هَلْ تُحِبُّ المَلَابِسَ القُطْنِيَّةَ أَمِ الصُّوفِيَّةَ؟</a:t>
@@ -16950,6 +17085,7 @@
                   <a:srgbClr val="1B3B6F"/>
                 </a:solidFill>
                 <a:latin typeface="Amiri" pitchFamily="2" charset="-78"/>
+                <a:ea typeface="Amiri" pitchFamily="2" charset="-78"/>
                 <a:cs typeface="Amiri" pitchFamily="2" charset="-78"/>
               </a:rPr>
               <a:t>عَفْوًا، هَلْ يُمْكِنُ أَنْ تُعِيدَ السُّؤَالَ؟</a:t>
@@ -17083,6 +17219,7 @@
                   <a:srgbClr val="D4AF37"/>
                 </a:solidFill>
                 <a:latin typeface="Amiri" pitchFamily="2" charset="-78"/>
+                <a:ea typeface="Amiri" pitchFamily="2" charset="-78"/>
                 <a:cs typeface="Amiri" pitchFamily="2" charset="-78"/>
               </a:rPr>
               <a:t>م</a:t>
@@ -17403,6 +17540,7 @@
                   <a:srgbClr val="8A6D1E"/>
                 </a:solidFill>
                 <a:latin typeface="Amiri" pitchFamily="2" charset="-78"/>
+                <a:ea typeface="Amiri" pitchFamily="2" charset="-78"/>
                 <a:cs typeface="Amiri" pitchFamily="2" charset="-78"/>
               </a:rPr>
               <a:t>المَقَايِيسُ وَالمَوَادُّ</a:t>
@@ -17683,6 +17821,7 @@
                   <a:srgbClr val="1B3B6F"/>
                 </a:solidFill>
                 <a:latin typeface="Amiri" pitchFamily="2" charset="-78"/>
+                <a:ea typeface="Amiri" pitchFamily="2" charset="-78"/>
                 <a:cs typeface="Amiri" pitchFamily="2" charset="-78"/>
               </a:rPr>
               <a:t>غُرْفَتِي … طُولُهَا … وَعَرْضُهَا …</a:t>
@@ -17759,6 +17898,7 @@
                   <a:srgbClr val="1B3B6F"/>
                 </a:solidFill>
                 <a:latin typeface="Amiri" pitchFamily="2" charset="-78"/>
+                <a:ea typeface="Amiri" pitchFamily="2" charset="-78"/>
                 <a:cs typeface="Amiri" pitchFamily="2" charset="-78"/>
               </a:rPr>
               <a:t>صِفْ غُرْفَتَكَ: حَجْمَهَا وَشَكْلَهَا.</a:t>
@@ -17862,6 +18002,7 @@
                   <a:srgbClr val="1B3B6F"/>
                 </a:solidFill>
                 <a:latin typeface="Amiri" pitchFamily="2" charset="-78"/>
+                <a:ea typeface="Amiri" pitchFamily="2" charset="-78"/>
                 <a:cs typeface="Amiri" pitchFamily="2" charset="-78"/>
               </a:rPr>
               <a:t>أَهَمُّ شَيْءٍ عِنْدِي … مَصْنُوعٌ مِنْ …</a:t>
@@ -17938,6 +18079,7 @@
                   <a:srgbClr val="1B3B6F"/>
                 </a:solidFill>
                 <a:latin typeface="Amiri" pitchFamily="2" charset="-78"/>
+                <a:ea typeface="Amiri" pitchFamily="2" charset="-78"/>
                 <a:cs typeface="Amiri" pitchFamily="2" charset="-78"/>
               </a:rPr>
               <a:t>صِفْ شَيْئًا مُهِمًّا لَكَ.</a:t>
@@ -18041,6 +18183,7 @@
                   <a:srgbClr val="1B3B6F"/>
                 </a:solidFill>
                 <a:latin typeface="Amiri" pitchFamily="2" charset="-78"/>
+                <a:ea typeface="Amiri" pitchFamily="2" charset="-78"/>
                 <a:cs typeface="Amiri" pitchFamily="2" charset="-78"/>
               </a:rPr>
               <a:t>نَعَمْ، اشْتَرَيْتُ … لِأَنَّ …</a:t>
@@ -18117,6 +18260,7 @@
                   <a:srgbClr val="1B3B6F"/>
                 </a:solidFill>
                 <a:latin typeface="Amiri" pitchFamily="2" charset="-78"/>
+                <a:ea typeface="Amiri" pitchFamily="2" charset="-78"/>
                 <a:cs typeface="Amiri" pitchFamily="2" charset="-78"/>
               </a:rPr>
               <a:t>هَلْ تَشْتَرِي أَشْيَاءَ مُسْتَعْمَلَةً؟</a:t>
@@ -18220,6 +18364,7 @@
                   <a:srgbClr val="1B3B6F"/>
                 </a:solidFill>
                 <a:latin typeface="Amiri" pitchFamily="2" charset="-78"/>
+                <a:ea typeface="Amiri" pitchFamily="2" charset="-78"/>
                 <a:cs typeface="Amiri" pitchFamily="2" charset="-78"/>
               </a:rPr>
               <a:t>لِأَنَّهُ أَ… وَأَ… مِنْ …</a:t>
@@ -18296,6 +18441,7 @@
                   <a:srgbClr val="1B3B6F"/>
                 </a:solidFill>
                 <a:latin typeface="Amiri" pitchFamily="2" charset="-78"/>
+                <a:ea typeface="Amiri" pitchFamily="2" charset="-78"/>
                 <a:cs typeface="Amiri" pitchFamily="2" charset="-78"/>
               </a:rPr>
               <a:t>لِمَاذَا نَسْتَخْدِمُ البْلَاسْتِيكَ كَثِيرًا؟</a:t>
@@ -18399,6 +18545,7 @@
                   <a:srgbClr val="1B3B6F"/>
                 </a:solidFill>
                 <a:latin typeface="Amiri" pitchFamily="2" charset="-78"/>
+                <a:ea typeface="Amiri" pitchFamily="2" charset="-78"/>
                 <a:cs typeface="Amiri" pitchFamily="2" charset="-78"/>
               </a:rPr>
               <a:t>صَنَعْتُ … مِنْ … طُولُهُ …</a:t>
@@ -18475,6 +18622,7 @@
                   <a:srgbClr val="1B3B6F"/>
                 </a:solidFill>
                 <a:latin typeface="Amiri" pitchFamily="2" charset="-78"/>
+                <a:ea typeface="Amiri" pitchFamily="2" charset="-78"/>
                 <a:cs typeface="Amiri" pitchFamily="2" charset="-78"/>
               </a:rPr>
               <a:t>صِفْ شَيْئًا صَنَعْتَهُ بِيَدِكَ.</a:t>
@@ -18684,6 +18832,7 @@
                   <a:srgbClr val="D4AF37"/>
                 </a:solidFill>
                 <a:latin typeface="Amiri" pitchFamily="2" charset="-78"/>
+                <a:ea typeface="Amiri" pitchFamily="2" charset="-78"/>
                 <a:cs typeface="Amiri" pitchFamily="2" charset="-78"/>
               </a:rPr>
               <a:t>م</a:t>
@@ -19004,6 +19153,7 @@
                   <a:srgbClr val="8A6D1E"/>
                 </a:solidFill>
                 <a:latin typeface="Amiri" pitchFamily="2" charset="-78"/>
+                <a:ea typeface="Amiri" pitchFamily="2" charset="-78"/>
                 <a:cs typeface="Amiri" pitchFamily="2" charset="-78"/>
               </a:rPr>
               <a:t>المَوَادُّ وَالمُسْتَقْبَلُ</a:t>
@@ -19284,6 +19434,7 @@
                   <a:srgbClr val="1B3B6F"/>
                 </a:solidFill>
                 <a:latin typeface="Amiri" pitchFamily="2" charset="-78"/>
+                <a:ea typeface="Amiri" pitchFamily="2" charset="-78"/>
                 <a:cs typeface="Amiri" pitchFamily="2" charset="-78"/>
               </a:rPr>
               <a:t>صَحِيحٌ أَنَّ … غَيْرَ أَنَّ …</a:t>
@@ -19360,6 +19511,7 @@
                   <a:srgbClr val="1B3B6F"/>
                 </a:solidFill>
                 <a:latin typeface="Amiri" pitchFamily="2" charset="-78"/>
+                <a:ea typeface="Amiri" pitchFamily="2" charset="-78"/>
                 <a:cs typeface="Amiri" pitchFamily="2" charset="-78"/>
               </a:rPr>
               <a:t>هَلِ الأَشْيَاءُ القَدِيمَةُ أَفْضَلُ صُنْعًا مِنَ الحَدِيثَةِ؟</a:t>
@@ -19463,6 +19615,7 @@
                   <a:srgbClr val="1B3B6F"/>
                 </a:solidFill>
                 <a:latin typeface="Amiri" pitchFamily="2" charset="-78"/>
+                <a:ea typeface="Amiri" pitchFamily="2" charset="-78"/>
                 <a:cs typeface="Amiri" pitchFamily="2" charset="-78"/>
               </a:rPr>
               <a:t>لِأَنَّ الشَّرِكَاتِ … مِمَّا …</a:t>
@@ -19539,6 +19692,7 @@
                   <a:srgbClr val="1B3B6F"/>
                 </a:solidFill>
                 <a:latin typeface="Amiri" pitchFamily="2" charset="-78"/>
+                <a:ea typeface="Amiri" pitchFamily="2" charset="-78"/>
                 <a:cs typeface="Amiri" pitchFamily="2" charset="-78"/>
               </a:rPr>
               <a:t>لِمَاذَا تُصْنَعُ الأَجْهِزَةُ اليَوْمَ بِحَيْثُ لَا تَدُومُ طَوِيلًا؟</a:t>
@@ -19642,6 +19796,7 @@
                   <a:srgbClr val="1B3B6F"/>
                 </a:solidFill>
                 <a:latin typeface="Amiri" pitchFamily="2" charset="-78"/>
+                <a:ea typeface="Amiri" pitchFamily="2" charset="-78"/>
                 <a:cs typeface="Amiri" pitchFamily="2" charset="-78"/>
               </a:rPr>
               <a:t>مِنْ نَاحِيَةٍ … وَمِنْ نَاحِيَةٍ أُخْرَى …</a:t>
@@ -19718,6 +19873,7 @@
                   <a:srgbClr val="1B3B6F"/>
                 </a:solidFill>
                 <a:latin typeface="Amiri" pitchFamily="2" charset="-78"/>
+                <a:ea typeface="Amiri" pitchFamily="2" charset="-78"/>
                 <a:cs typeface="Amiri" pitchFamily="2" charset="-78"/>
               </a:rPr>
               <a:t>مَا رَأْيُكَ فِي الأَكْيَاسِ الوَرَقِيَّةِ بَدَلًا مِنَ البْلَاسْتِيكِيَّةِ؟</a:t>
@@ -19821,6 +19977,7 @@
                   <a:srgbClr val="1B3B6F"/>
                 </a:solidFill>
                 <a:latin typeface="Amiri" pitchFamily="2" charset="-78"/>
+                <a:ea typeface="Amiri" pitchFamily="2" charset="-78"/>
                 <a:cs typeface="Amiri" pitchFamily="2" charset="-78"/>
               </a:rPr>
               <a:t>كَانَتْ تُبْنَى مِنْ … لِأَنَّ …</a:t>
@@ -19897,6 +20054,7 @@
                   <a:srgbClr val="1B3B6F"/>
                 </a:solidFill>
                 <a:latin typeface="Amiri" pitchFamily="2" charset="-78"/>
+                <a:ea typeface="Amiri" pitchFamily="2" charset="-78"/>
                 <a:cs typeface="Amiri" pitchFamily="2" charset="-78"/>
               </a:rPr>
               <a:t>كَيْفَ كَانَتِ البُيُوتُ تُبْنَى فِي بِلَادِ أَجْدَادِكَ؟</a:t>
@@ -20000,6 +20158,7 @@
                   <a:srgbClr val="1B3B6F"/>
                 </a:solidFill>
                 <a:latin typeface="Amiri" pitchFamily="2" charset="-78"/>
+                <a:ea typeface="Amiri" pitchFamily="2" charset="-78"/>
                 <a:cs typeface="Amiri" pitchFamily="2" charset="-78"/>
               </a:rPr>
               <a:t>لَوْ بَنَيْتُهُ، لَجَعَلْتُهُ مَبْنِيًّا مِنْ …</a:t>
@@ -20076,6 +20235,7 @@
                   <a:srgbClr val="1B3B6F"/>
                 </a:solidFill>
                 <a:latin typeface="Amiri" pitchFamily="2" charset="-78"/>
+                <a:ea typeface="Amiri" pitchFamily="2" charset="-78"/>
                 <a:cs typeface="Amiri" pitchFamily="2" charset="-78"/>
               </a:rPr>
               <a:t>لَوْ بَنَيْتَ بَيْتَ أَحْلَامِكَ، مِمَّ يَكُونُ مَبْنِيًّا؟</a:t>
@@ -20285,6 +20445,7 @@
                   <a:srgbClr val="D4AF37"/>
                 </a:solidFill>
                 <a:latin typeface="Amiri" pitchFamily="2" charset="-78"/>
+                <a:ea typeface="Amiri" pitchFamily="2" charset="-78"/>
                 <a:cs typeface="Amiri" pitchFamily="2" charset="-78"/>
               </a:rPr>
               <a:t>م</a:t>
@@ -20605,6 +20766,7 @@
                   <a:srgbClr val="8A6D1E"/>
                 </a:solidFill>
                 <a:latin typeface="Amiri" pitchFamily="2" charset="-78"/>
+                <a:ea typeface="Amiri" pitchFamily="2" charset="-78"/>
                 <a:cs typeface="Amiri" pitchFamily="2" charset="-78"/>
               </a:rPr>
               <a:t>آدَابُ الصَّفِّ</a:t>
@@ -22136,6 +22298,7 @@
                   <a:srgbClr val="D4AF37"/>
                 </a:solidFill>
                 <a:latin typeface="Amiri" pitchFamily="2" charset="-78"/>
+                <a:ea typeface="Amiri" pitchFamily="2" charset="-78"/>
                 <a:cs typeface="Amiri" pitchFamily="2" charset="-78"/>
               </a:rPr>
               <a:t>م</a:t>
@@ -22456,6 +22619,7 @@
                   <a:srgbClr val="8A6D1E"/>
                 </a:solidFill>
                 <a:latin typeface="Amiri" pitchFamily="2" charset="-78"/>
+                <a:ea typeface="Amiri" pitchFamily="2" charset="-78"/>
                 <a:cs typeface="Amiri" pitchFamily="2" charset="-78"/>
               </a:rPr>
               <a:t>نَمُوذَجُ الإِجَابَةِ</a:t>
@@ -22698,6 +22862,7 @@
                   <a:srgbClr val="1B3B6F"/>
                 </a:solidFill>
                 <a:latin typeface="Amiri" pitchFamily="2" charset="-78"/>
+                <a:ea typeface="Amiri" pitchFamily="2" charset="-78"/>
                 <a:cs typeface="Amiri" pitchFamily="2" charset="-78"/>
               </a:rPr>
               <a:t>حَقِيبَتِي سَوْدَاءُ، وَهِيَ مَصْنُوعَةٌ مِنَ القُمَاشِ.</a:t>
@@ -22774,6 +22939,7 @@
                   <a:srgbClr val="1B3B6F"/>
                 </a:solidFill>
                 <a:latin typeface="Amiri" pitchFamily="2" charset="-78"/>
+                <a:ea typeface="Amiri" pitchFamily="2" charset="-78"/>
                 <a:cs typeface="Amiri" pitchFamily="2" charset="-78"/>
               </a:rPr>
               <a:t>صِفْ حَقِيبَتَكَ المَدْرَسِيَّةَ.</a:t>
@@ -22877,6 +23043,7 @@
                   <a:srgbClr val="1B3B6F"/>
                 </a:solidFill>
                 <a:latin typeface="Amiri" pitchFamily="2" charset="-78"/>
+                <a:ea typeface="Amiri" pitchFamily="2" charset="-78"/>
                 <a:cs typeface="Amiri" pitchFamily="2" charset="-78"/>
               </a:rPr>
               <a:t>طَاوِلَتُنَا مُسْتَطِيلَةٌ وَخَشَبِيَّةٌ.</a:t>
@@ -22953,6 +23120,7 @@
                   <a:srgbClr val="1B3B6F"/>
                 </a:solidFill>
                 <a:latin typeface="Amiri" pitchFamily="2" charset="-78"/>
+                <a:ea typeface="Amiri" pitchFamily="2" charset="-78"/>
                 <a:cs typeface="Amiri" pitchFamily="2" charset="-78"/>
               </a:rPr>
               <a:t>مَا شَكْلُ طَاوِلَةِ المَطْبَخِ فِي بَيْتِكَ؟</a:t>
@@ -23056,6 +23224,7 @@
                   <a:srgbClr val="1B3B6F"/>
                 </a:solidFill>
                 <a:latin typeface="Amiri" pitchFamily="2" charset="-78"/>
+                <a:ea typeface="Amiri" pitchFamily="2" charset="-78"/>
                 <a:cs typeface="Amiri" pitchFamily="2" charset="-78"/>
               </a:rPr>
               <a:t>طُولِي مِتْرٌ وَسِتُّونَ سَنْتِيمِتْرًا.</a:t>
@@ -23132,6 +23301,7 @@
                   <a:srgbClr val="1B3B6F"/>
                 </a:solidFill>
                 <a:latin typeface="Amiri" pitchFamily="2" charset="-78"/>
+                <a:ea typeface="Amiri" pitchFamily="2" charset="-78"/>
                 <a:cs typeface="Amiri" pitchFamily="2" charset="-78"/>
               </a:rPr>
               <a:t>كَمْ طُولُكَ؟</a:t>
@@ -23235,6 +23405,7 @@
                   <a:srgbClr val="1B3B6F"/>
                 </a:solidFill>
                 <a:latin typeface="Amiri" pitchFamily="2" charset="-78"/>
+                <a:ea typeface="Amiri" pitchFamily="2" charset="-78"/>
                 <a:cs typeface="Amiri" pitchFamily="2" charset="-78"/>
               </a:rPr>
               <a:t>هَاتِفِي مَصْنُوعٌ مِنَ المَعْدِنِ وَالزُّجَاجِ.</a:t>
@@ -23311,6 +23482,7 @@
                   <a:srgbClr val="1B3B6F"/>
                 </a:solidFill>
                 <a:latin typeface="Amiri" pitchFamily="2" charset="-78"/>
+                <a:ea typeface="Amiri" pitchFamily="2" charset="-78"/>
                 <a:cs typeface="Amiri" pitchFamily="2" charset="-78"/>
               </a:rPr>
               <a:t>مِمَّ هَاتِفُكَ مَصْنُوعٌ؟</a:t>
@@ -23414,6 +23586,7 @@
                   <a:srgbClr val="1B3B6F"/>
                 </a:solidFill>
                 <a:latin typeface="Amiri" pitchFamily="2" charset="-78"/>
+                <a:ea typeface="Amiri" pitchFamily="2" charset="-78"/>
                 <a:cs typeface="Amiri" pitchFamily="2" charset="-78"/>
               </a:rPr>
               <a:t>أُحِبُّ المَلَابِسَ القُطْنِيَّةَ، لِأَنَّهَا خَفِيفَةٌ.</a:t>
@@ -23490,6 +23663,7 @@
                   <a:srgbClr val="1B3B6F"/>
                 </a:solidFill>
                 <a:latin typeface="Amiri" pitchFamily="2" charset="-78"/>
+                <a:ea typeface="Amiri" pitchFamily="2" charset="-78"/>
                 <a:cs typeface="Amiri" pitchFamily="2" charset="-78"/>
               </a:rPr>
               <a:t>هَلْ تُحِبُّ المَلَابِسَ القُطْنِيَّةَ أَمِ الصُّوفِيَّةَ؟</a:t>
@@ -23699,6 +23873,7 @@
                   <a:srgbClr val="D4AF37"/>
                 </a:solidFill>
                 <a:latin typeface="Amiri" pitchFamily="2" charset="-78"/>
+                <a:ea typeface="Amiri" pitchFamily="2" charset="-78"/>
                 <a:cs typeface="Amiri" pitchFamily="2" charset="-78"/>
               </a:rPr>
               <a:t>م</a:t>
@@ -24019,6 +24194,7 @@
                   <a:srgbClr val="8A6D1E"/>
                 </a:solidFill>
                 <a:latin typeface="Amiri" pitchFamily="2" charset="-78"/>
+                <a:ea typeface="Amiri" pitchFamily="2" charset="-78"/>
                 <a:cs typeface="Amiri" pitchFamily="2" charset="-78"/>
               </a:rPr>
               <a:t>نَمُوذَجُ الإِجَابَةِ</a:t>
@@ -24261,6 +24437,7 @@
                   <a:srgbClr val="1B3B6F"/>
                 </a:solidFill>
                 <a:latin typeface="Amiri" pitchFamily="2" charset="-78"/>
+                <a:ea typeface="Amiri" pitchFamily="2" charset="-78"/>
                 <a:cs typeface="Amiri" pitchFamily="2" charset="-78"/>
               </a:rPr>
               <a:t>غُرْفَتِي مُرَبَّعَةٌ تَقْرِيبًا؛ طُولُهَا ثَلَاثَةُ أَمْتَارٍ، وَعَرْضُهَا مِتْرَانِ وَنِصْفٌ، وَفِيهَا نَافِذَةٌ كَبِيرَةٌ.</a:t>
@@ -24337,6 +24514,7 @@
                   <a:srgbClr val="1B3B6F"/>
                 </a:solidFill>
                 <a:latin typeface="Amiri" pitchFamily="2" charset="-78"/>
+                <a:ea typeface="Amiri" pitchFamily="2" charset="-78"/>
                 <a:cs typeface="Amiri" pitchFamily="2" charset="-78"/>
               </a:rPr>
               <a:t>صِفْ غُرْفَتَكَ: حَجْمَهَا وَشَكْلَهَا.</a:t>
@@ -24440,6 +24618,7 @@
                   <a:srgbClr val="1B3B6F"/>
                 </a:solidFill>
                 <a:latin typeface="Amiri" pitchFamily="2" charset="-78"/>
+                <a:ea typeface="Amiri" pitchFamily="2" charset="-78"/>
                 <a:cs typeface="Amiri" pitchFamily="2" charset="-78"/>
               </a:rPr>
               <a:t>أَهَمُّ شَيْءٍ عِنْدِي سَاعَةٌ فِضِّيَّةٌ أَهْدَاهَا لِي جَدِّي؛ هِيَ دَائِرِيَّةٌ، وَمَصْنُوعَةٌ مِنَ الفِضَّةِ وَالجِلْدِ.</a:t>
@@ -24516,6 +24695,7 @@
                   <a:srgbClr val="1B3B6F"/>
                 </a:solidFill>
                 <a:latin typeface="Amiri" pitchFamily="2" charset="-78"/>
+                <a:ea typeface="Amiri" pitchFamily="2" charset="-78"/>
                 <a:cs typeface="Amiri" pitchFamily="2" charset="-78"/>
               </a:rPr>
               <a:t>صِفْ شَيْئًا مُهِمًّا لَكَ.</a:t>
@@ -24619,6 +24799,7 @@
                   <a:srgbClr val="1B3B6F"/>
                 </a:solidFill>
                 <a:latin typeface="Amiri" pitchFamily="2" charset="-78"/>
+                <a:ea typeface="Amiri" pitchFamily="2" charset="-78"/>
                 <a:cs typeface="Amiri" pitchFamily="2" charset="-78"/>
               </a:rPr>
               <a:t>نَعَمْ، اشْتَرَيْتُ دَرَّاجَةً مُسْتَعْمَلَةً، لِأَنَّهَا أَرْخَصُ بِكَثِيرٍ، وَمَا زَالَتْ قَوِيَّةً.</a:t>
@@ -24695,6 +24876,7 @@
                   <a:srgbClr val="1B3B6F"/>
                 </a:solidFill>
                 <a:latin typeface="Amiri" pitchFamily="2" charset="-78"/>
+                <a:ea typeface="Amiri" pitchFamily="2" charset="-78"/>
                 <a:cs typeface="Amiri" pitchFamily="2" charset="-78"/>
               </a:rPr>
               <a:t>هَلْ تَشْتَرِي أَشْيَاءَ مُسْتَعْمَلَةً؟</a:t>
@@ -24798,6 +24980,7 @@
                   <a:srgbClr val="1B3B6F"/>
                 </a:solidFill>
                 <a:latin typeface="Amiri" pitchFamily="2" charset="-78"/>
+                <a:ea typeface="Amiri" pitchFamily="2" charset="-78"/>
                 <a:cs typeface="Amiri" pitchFamily="2" charset="-78"/>
               </a:rPr>
               <a:t>لِأَنَّهُ أَخَفُّ وَأَرْخَصُ مِنَ الزُّجَاجِ وَالمَعْدِنِ، لٰكِنَّهُ يُلَوِّثُ البِيئَةَ.</a:t>
@@ -24874,6 +25057,7 @@
                   <a:srgbClr val="1B3B6F"/>
                 </a:solidFill>
                 <a:latin typeface="Amiri" pitchFamily="2" charset="-78"/>
+                <a:ea typeface="Amiri" pitchFamily="2" charset="-78"/>
                 <a:cs typeface="Amiri" pitchFamily="2" charset="-78"/>
               </a:rPr>
               <a:t>لِمَاذَا نَسْتَخْدِمُ البْلَاسْتِيكَ كَثِيرًا؟</a:t>
@@ -24977,6 +25161,7 @@
                   <a:srgbClr val="1B3B6F"/>
                 </a:solidFill>
                 <a:latin typeface="Amiri" pitchFamily="2" charset="-78"/>
+                <a:ea typeface="Amiri" pitchFamily="2" charset="-78"/>
                 <a:cs typeface="Amiri" pitchFamily="2" charset="-78"/>
               </a:rPr>
               <a:t>صَنَعْتُ صُنْدُوقًا خَشَبِيًّا فِي حِصَّةِ التِّكْنُولُوجْيَا، طُولُهُ ثَلَاثُونَ سَنْتِيمِتْرًا، وَلَوَّنْتُهُ بِالأَزْرَقِ.</a:t>
@@ -25053,6 +25238,7 @@
                   <a:srgbClr val="1B3B6F"/>
                 </a:solidFill>
                 <a:latin typeface="Amiri" pitchFamily="2" charset="-78"/>
+                <a:ea typeface="Amiri" pitchFamily="2" charset="-78"/>
                 <a:cs typeface="Amiri" pitchFamily="2" charset="-78"/>
               </a:rPr>
               <a:t>صِفْ شَيْئًا صَنَعْتَهُ بِيَدِكَ.</a:t>
@@ -25262,6 +25448,7 @@
                   <a:srgbClr val="D4AF37"/>
                 </a:solidFill>
                 <a:latin typeface="Amiri" pitchFamily="2" charset="-78"/>
+                <a:ea typeface="Amiri" pitchFamily="2" charset="-78"/>
                 <a:cs typeface="Amiri" pitchFamily="2" charset="-78"/>
               </a:rPr>
               <a:t>م</a:t>
@@ -25582,6 +25769,7 @@
                   <a:srgbClr val="8A6D1E"/>
                 </a:solidFill>
                 <a:latin typeface="Amiri" pitchFamily="2" charset="-78"/>
+                <a:ea typeface="Amiri" pitchFamily="2" charset="-78"/>
                 <a:cs typeface="Amiri" pitchFamily="2" charset="-78"/>
               </a:rPr>
               <a:t>نَمُوذَجُ الإِجَابَةِ</a:t>
@@ -25824,6 +26012,7 @@
                   <a:srgbClr val="1B3B6F"/>
                 </a:solidFill>
                 <a:latin typeface="Amiri" pitchFamily="2" charset="-78"/>
+                <a:ea typeface="Amiri" pitchFamily="2" charset="-78"/>
                 <a:cs typeface="Amiri" pitchFamily="2" charset="-78"/>
               </a:rPr>
               <a:t>صَحِيحٌ أَنَّ أَثَاثَ جَدَّتِي الخَشَبِيَّ عَاشَ خَمْسِينَ سَنَةً، غَيْرَ أَنَّ الأَجْهِزَةَ الحَدِيثَةَ أَخَفُّ وَأَكْثَرُ أَمَانًا.</a:t>
@@ -25900,6 +26089,7 @@
                   <a:srgbClr val="1B3B6F"/>
                 </a:solidFill>
                 <a:latin typeface="Amiri" pitchFamily="2" charset="-78"/>
+                <a:ea typeface="Amiri" pitchFamily="2" charset="-78"/>
                 <a:cs typeface="Amiri" pitchFamily="2" charset="-78"/>
               </a:rPr>
               <a:t>هَلِ الأَشْيَاءُ القَدِيمَةُ أَفْضَلُ صُنْعًا مِنَ الحَدِيثَةِ؟</a:t>
@@ -26003,6 +26193,7 @@
                   <a:srgbClr val="1B3B6F"/>
                 </a:solidFill>
                 <a:latin typeface="Amiri" pitchFamily="2" charset="-78"/>
+                <a:ea typeface="Amiri" pitchFamily="2" charset="-78"/>
                 <a:cs typeface="Amiri" pitchFamily="2" charset="-78"/>
               </a:rPr>
               <a:t>لِأَنَّ الشَّرِكَاتِ تُرِيدُ أَنْ نَشْتَرِيَ أَجْهِزَةً جَدِيدَةً، مِمَّا يَزِيدُ أَرْبَاحَهَا وَالنُّفَايَاتِ الإِلِكْتْرُونِيَّةَ مَعًا.</a:t>
@@ -26082,6 +26273,7 @@
                   <a:srgbClr val="1B3B6F"/>
                 </a:solidFill>
                 <a:latin typeface="Amiri" pitchFamily="2" charset="-78"/>
+                <a:ea typeface="Amiri" pitchFamily="2" charset="-78"/>
                 <a:cs typeface="Amiri" pitchFamily="2" charset="-78"/>
               </a:rPr>
               <a:t>لِمَاذَا تُصْنَعُ الأَجْهِزَةُ اليَوْمَ بِحَيْثُ لَا تَدُومُ طَوِيلًا؟</a:t>
@@ -26185,6 +26377,7 @@
                   <a:srgbClr val="1B3B6F"/>
                 </a:solidFill>
                 <a:latin typeface="Amiri" pitchFamily="2" charset="-78"/>
+                <a:ea typeface="Amiri" pitchFamily="2" charset="-78"/>
                 <a:cs typeface="Amiri" pitchFamily="2" charset="-78"/>
               </a:rPr>
               <a:t>مِنْ نَاحِيَةٍ، تَتَحَلَّلُ بِسُرْعَةٍ، وَمِنْ نَاحِيَةٍ أُخْرَى، صِنَاعَتُهَا تَحْتَاجُ إِلَى أَشْجَارٍ وَمَاءٍ كَثِيرٍ؛ لِذٰلِكَ أُفَضِّلُ الحَقِيبَةَ القُمَاشِيَّةَ.</a:t>
@@ -26264,6 +26457,7 @@
                   <a:srgbClr val="1B3B6F"/>
                 </a:solidFill>
                 <a:latin typeface="Amiri" pitchFamily="2" charset="-78"/>
+                <a:ea typeface="Amiri" pitchFamily="2" charset="-78"/>
                 <a:cs typeface="Amiri" pitchFamily="2" charset="-78"/>
               </a:rPr>
               <a:t>مَا رَأْيُكَ فِي الأَكْيَاسِ الوَرَقِيَّةِ بَدَلًا مِنَ البْلَاسْتِيكِيَّةِ؟</a:t>
@@ -26473,6 +26667,7 @@
                   <a:srgbClr val="D4AF37"/>
                 </a:solidFill>
                 <a:latin typeface="Amiri" pitchFamily="2" charset="-78"/>
+                <a:ea typeface="Amiri" pitchFamily="2" charset="-78"/>
                 <a:cs typeface="Amiri" pitchFamily="2" charset="-78"/>
               </a:rPr>
               <a:t>م</a:t>
@@ -26793,6 +26988,7 @@
                   <a:srgbClr val="8A6D1E"/>
                 </a:solidFill>
                 <a:latin typeface="Amiri" pitchFamily="2" charset="-78"/>
+                <a:ea typeface="Amiri" pitchFamily="2" charset="-78"/>
                 <a:cs typeface="Amiri" pitchFamily="2" charset="-78"/>
               </a:rPr>
               <a:t>نَمُوذَجُ الإِجَابَةِ</a:t>
@@ -27035,6 +27231,7 @@
                   <a:srgbClr val="1B3B6F"/>
                 </a:solidFill>
                 <a:latin typeface="Amiri" pitchFamily="2" charset="-78"/>
+                <a:ea typeface="Amiri" pitchFamily="2" charset="-78"/>
                 <a:cs typeface="Amiri" pitchFamily="2" charset="-78"/>
               </a:rPr>
               <a:t>كَانَتْ تُبْنَى مِنَ الطِّينِ وَالحَجَرِ، وَجُدْرَانُهَا سَمِيكَةٌ، لِأَنَّ ذٰلِكَ يُبْقِيهَا بَارِدَةً فِي الصَّيْفِ الحَارِّ.</a:t>
@@ -27111,6 +27308,7 @@
                   <a:srgbClr val="1B3B6F"/>
                 </a:solidFill>
                 <a:latin typeface="Amiri" pitchFamily="2" charset="-78"/>
+                <a:ea typeface="Amiri" pitchFamily="2" charset="-78"/>
                 <a:cs typeface="Amiri" pitchFamily="2" charset="-78"/>
               </a:rPr>
               <a:t>كَيْفَ كَانَتِ البُيُوتُ تُبْنَى فِي بِلَادِ أَجْدَادِكَ؟</a:t>
@@ -27214,6 +27412,7 @@
                   <a:srgbClr val="1B3B6F"/>
                 </a:solidFill>
                 <a:latin typeface="Amiri" pitchFamily="2" charset="-78"/>
+                <a:ea typeface="Amiri" pitchFamily="2" charset="-78"/>
                 <a:cs typeface="Amiri" pitchFamily="2" charset="-78"/>
               </a:rPr>
               <a:t>لَوْ بَنَيْتُهُ، لَجَعَلْتُهُ مَبْنِيًّا مِنَ الخَشَبِ وَالزُّجَاجِ، بِأَلْوَاحٍ شَمْسِيَّةٍ عَلَى سَطْحِهِ، وَحَدِيقَةٍ دَائِرِيَّةٍ فِي وَسَطِهِ.</a:t>
@@ -27290,6 +27489,7 @@
                   <a:srgbClr val="1B3B6F"/>
                 </a:solidFill>
                 <a:latin typeface="Amiri" pitchFamily="2" charset="-78"/>
+                <a:ea typeface="Amiri" pitchFamily="2" charset="-78"/>
                 <a:cs typeface="Amiri" pitchFamily="2" charset="-78"/>
               </a:rPr>
               <a:t>لَوْ بَنَيْتَ بَيْتَ أَحْلَامِكَ، مِمَّ يَكُونُ مَبْنِيًّا؟</a:t>
@@ -27499,6 +27699,7 @@
                   <a:srgbClr val="D4AF37"/>
                 </a:solidFill>
                 <a:latin typeface="Amiri" pitchFamily="2" charset="-78"/>
+                <a:ea typeface="Amiri" pitchFamily="2" charset="-78"/>
                 <a:cs typeface="Amiri" pitchFamily="2" charset="-78"/>
               </a:rPr>
               <a:t>م</a:t>
@@ -27819,6 +28020,7 @@
                   <a:srgbClr val="8A6D1E"/>
                 </a:solidFill>
                 <a:latin typeface="Amiri" pitchFamily="2" charset="-78"/>
+                <a:ea typeface="Amiri" pitchFamily="2" charset="-78"/>
                 <a:cs typeface="Amiri" pitchFamily="2" charset="-78"/>
               </a:rPr>
               <a:t>قَيِّمْ عَمَلَكَ</a:t>
@@ -29063,6 +29265,7 @@
                   <a:srgbClr val="FFFFFF"/>
                 </a:solidFill>
                 <a:latin typeface="Amiri" pitchFamily="2" charset="-78"/>
+                <a:ea typeface="Amiri" pitchFamily="2" charset="-78"/>
                 <a:cs typeface="Amiri" pitchFamily="2" charset="-78"/>
               </a:rPr>
               <a:t>أَحْسَنْتُمْ! إِلَى اللِّقَاءِ</a:t>
@@ -29215,6 +29418,7 @@
                   <a:srgbClr val="D4AF37"/>
                 </a:solidFill>
                 <a:latin typeface="Amiri" pitchFamily="2" charset="-78"/>
+                <a:ea typeface="Amiri" pitchFamily="2" charset="-78"/>
                 <a:cs typeface="Amiri" pitchFamily="2" charset="-78"/>
               </a:rPr>
               <a:t>وَرْشَةُ الكِتَابَةِ</a:t>
@@ -29348,6 +29552,7 @@
                   <a:srgbClr val="D4AF37"/>
                 </a:solidFill>
                 <a:latin typeface="Amiri" pitchFamily="2" charset="-78"/>
+                <a:ea typeface="Amiri" pitchFamily="2" charset="-78"/>
                 <a:cs typeface="Amiri" pitchFamily="2" charset="-78"/>
               </a:rPr>
               <a:t>م</a:t>
@@ -29668,6 +29873,7 @@
                   <a:srgbClr val="8A6D1E"/>
                 </a:solidFill>
                 <a:latin typeface="Amiri" pitchFamily="2" charset="-78"/>
+                <a:ea typeface="Amiri" pitchFamily="2" charset="-78"/>
                 <a:cs typeface="Amiri" pitchFamily="2" charset="-78"/>
               </a:rPr>
               <a:t>خَرِيطَةُ الوَرْشَةِ</a:t>
@@ -29982,6 +30188,7 @@
                   <a:srgbClr val="1B3B6F"/>
                 </a:solidFill>
                 <a:latin typeface="Amiri" pitchFamily="2" charset="-78"/>
+                <a:ea typeface="Amiri" pitchFamily="2" charset="-78"/>
                 <a:cs typeface="Amiri" pitchFamily="2" charset="-78"/>
               </a:rPr>
               <a:t>كَيْفَ</a:t>
@@ -30258,6 +30465,7 @@
                   <a:srgbClr val="1E6B52"/>
                 </a:solidFill>
                 <a:latin typeface="Amiri" pitchFamily="2" charset="-78"/>
+                <a:ea typeface="Amiri" pitchFamily="2" charset="-78"/>
                 <a:cs typeface="Amiri" pitchFamily="2" charset="-78"/>
               </a:rPr>
               <a:t>تَمْثِيلُ الدَّوْرِ</a:t>
@@ -30534,6 +30742,7 @@
                   <a:srgbClr val="8A6D1E"/>
                 </a:solidFill>
                 <a:latin typeface="Amiri" pitchFamily="2" charset="-78"/>
+                <a:ea typeface="Amiri" pitchFamily="2" charset="-78"/>
                 <a:cs typeface="Amiri" pitchFamily="2" charset="-78"/>
               </a:rPr>
               <a:t>النَّمُوذَجُ</a:t>
@@ -30810,6 +31019,7 @@
                   <a:srgbClr val="1E6B52"/>
                 </a:solidFill>
                 <a:latin typeface="Amiri" pitchFamily="2" charset="-78"/>
+                <a:ea typeface="Amiri" pitchFamily="2" charset="-78"/>
                 <a:cs typeface="Amiri" pitchFamily="2" charset="-78"/>
               </a:rPr>
               <a:t>المُحَادَثَةُ</a:t>
@@ -31086,6 +31296,7 @@
                   <a:srgbClr val="8A6D1E"/>
                 </a:solidFill>
                 <a:latin typeface="Amiri" pitchFamily="2" charset="-78"/>
+                <a:ea typeface="Amiri" pitchFamily="2" charset="-78"/>
                 <a:cs typeface="Amiri" pitchFamily="2" charset="-78"/>
               </a:rPr>
               <a:t>قَيِّمْ</a:t>
@@ -31329,6 +31540,7 @@
                   <a:srgbClr val="D4AF37"/>
                 </a:solidFill>
                 <a:latin typeface="Amiri" pitchFamily="2" charset="-78"/>
+                <a:ea typeface="Amiri" pitchFamily="2" charset="-78"/>
                 <a:cs typeface="Amiri" pitchFamily="2" charset="-78"/>
               </a:rPr>
               <a:t>م</a:t>
@@ -31649,6 +31861,7 @@
                   <a:srgbClr val="8A6D1E"/>
                 </a:solidFill>
                 <a:latin typeface="Amiri" pitchFamily="2" charset="-78"/>
+                <a:ea typeface="Amiri" pitchFamily="2" charset="-78"/>
                 <a:cs typeface="Amiri" pitchFamily="2" charset="-78"/>
               </a:rPr>
               <a:t>امْتِحَانُ التَّحَدُّثِ</a:t>
@@ -32273,6 +32486,7 @@
                   <a:srgbClr val="1B3B6F"/>
                 </a:solidFill>
                 <a:latin typeface="Amiri" pitchFamily="2" charset="-78"/>
+                <a:ea typeface="Amiri" pitchFamily="2" charset="-78"/>
                 <a:cs typeface="Amiri" pitchFamily="2" charset="-78"/>
               </a:rPr>
               <a:t>عَفْوًا، هَلْ يُمْكِنُ أَنْ تُعِيدَ السُّؤَالَ؟</a:t>
@@ -32372,6 +32586,7 @@
                   <a:srgbClr val="1B3B6F"/>
                 </a:solidFill>
                 <a:latin typeface="Amiri" pitchFamily="2" charset="-78"/>
+                <a:ea typeface="Amiri" pitchFamily="2" charset="-78"/>
                 <a:cs typeface="Amiri" pitchFamily="2" charset="-78"/>
               </a:rPr>
               <a:t>لَحْظَةً، دَعْنِي أُفَكِّرُ …</a:t>
@@ -32471,6 +32686,7 @@
                   <a:srgbClr val="1B3B6F"/>
                 </a:solidFill>
                 <a:latin typeface="Amiri" pitchFamily="2" charset="-78"/>
+                <a:ea typeface="Amiri" pitchFamily="2" charset="-78"/>
                 <a:cs typeface="Amiri" pitchFamily="2" charset="-78"/>
               </a:rPr>
               <a:t>أَقْصِدُ …</a:t>
@@ -32642,6 +32858,7 @@
                   <a:srgbClr val="D4AF37"/>
                 </a:solidFill>
                 <a:latin typeface="Amiri" pitchFamily="2" charset="-78"/>
+                <a:ea typeface="Amiri" pitchFamily="2" charset="-78"/>
                 <a:cs typeface="Amiri" pitchFamily="2" charset="-78"/>
               </a:rPr>
               <a:t>م</a:t>
@@ -32962,6 +33179,7 @@
                   <a:srgbClr val="8A6D1E"/>
                 </a:solidFill>
                 <a:latin typeface="Amiri" pitchFamily="2" charset="-78"/>
+                <a:ea typeface="Amiri" pitchFamily="2" charset="-78"/>
                 <a:cs typeface="Amiri" pitchFamily="2" charset="-78"/>
               </a:rPr>
               <a:t>المَقَايِيسُ وَالأَشْكَالُ</a:t>
@@ -33265,6 +33483,7 @@
                   <a:srgbClr val="1B3B6F"/>
                 </a:solidFill>
                 <a:latin typeface="Amiri" pitchFamily="2" charset="-78"/>
+                <a:ea typeface="Amiri" pitchFamily="2" charset="-78"/>
                 <a:cs typeface="Amiri" pitchFamily="2" charset="-78"/>
               </a:rPr>
               <a:t>طُولٌ · عَرْضٌ · ارْتِفَاعٌ</a:t>
@@ -33422,6 +33641,7 @@
                   <a:srgbClr val="1B3B6F"/>
                 </a:solidFill>
                 <a:latin typeface="Amiri" pitchFamily="2" charset="-78"/>
+                <a:ea typeface="Amiri" pitchFamily="2" charset="-78"/>
                 <a:cs typeface="Amiri" pitchFamily="2" charset="-78"/>
               </a:rPr>
               <a:t>وَزْنٌ</a:t>
@@ -33525,6 +33745,7 @@
                   <a:srgbClr val="1B3B6F"/>
                 </a:solidFill>
                 <a:latin typeface="Amiri" pitchFamily="2" charset="-78"/>
+                <a:ea typeface="Amiri" pitchFamily="2" charset="-78"/>
                 <a:cs typeface="Amiri" pitchFamily="2" charset="-78"/>
               </a:rPr>
               <a:t>عَرْضُهَا</a:t>
@@ -33628,6 +33849,7 @@
                   <a:srgbClr val="1B3B6F"/>
                 </a:solidFill>
                 <a:latin typeface="Amiri" pitchFamily="2" charset="-78"/>
+                <a:ea typeface="Amiri" pitchFamily="2" charset="-78"/>
                 <a:cs typeface="Amiri" pitchFamily="2" charset="-78"/>
               </a:rPr>
               <a:t>طُولُهُ</a:t>
@@ -33893,6 +34115,7 @@
                   <a:srgbClr val="1B3B6F"/>
                 </a:solidFill>
                 <a:latin typeface="Amiri" pitchFamily="2" charset="-78"/>
+                <a:ea typeface="Amiri" pitchFamily="2" charset="-78"/>
                 <a:cs typeface="Amiri" pitchFamily="2" charset="-78"/>
               </a:rPr>
               <a:t>مِتْرٌ</a:t>
@@ -34050,6 +34273,7 @@
                   <a:srgbClr val="1B3B6F"/>
                 </a:solidFill>
                 <a:latin typeface="Amiri" pitchFamily="2" charset="-78"/>
+                <a:ea typeface="Amiri" pitchFamily="2" charset="-78"/>
                 <a:cs typeface="Amiri" pitchFamily="2" charset="-78"/>
               </a:rPr>
               <a:t>سَنْتِيمِتْرٌ</a:t>
@@ -34153,6 +34377,7 @@
                   <a:srgbClr val="1B3B6F"/>
                 </a:solidFill>
                 <a:latin typeface="Amiri" pitchFamily="2" charset="-78"/>
+                <a:ea typeface="Amiri" pitchFamily="2" charset="-78"/>
                 <a:cs typeface="Amiri" pitchFamily="2" charset="-78"/>
               </a:rPr>
               <a:t>أَمْتَارٌ</a:t>
@@ -34256,6 +34481,7 @@
                   <a:srgbClr val="1B3B6F"/>
                 </a:solidFill>
                 <a:latin typeface="Amiri" pitchFamily="2" charset="-78"/>
+                <a:ea typeface="Amiri" pitchFamily="2" charset="-78"/>
                 <a:cs typeface="Amiri" pitchFamily="2" charset="-78"/>
               </a:rPr>
               <a:t>مِتْرَانِ</a:t>
@@ -34521,6 +34747,7 @@
                   <a:srgbClr val="1B3B6F"/>
                 </a:solidFill>
                 <a:latin typeface="Amiri" pitchFamily="2" charset="-78"/>
+                <a:ea typeface="Amiri" pitchFamily="2" charset="-78"/>
                 <a:cs typeface="Amiri" pitchFamily="2" charset="-78"/>
               </a:rPr>
               <a:t>كِيلُوغْرَامٌ · غْرَامٌ</a:t>
@@ -34678,6 +34905,7 @@
                   <a:srgbClr val="1B3B6F"/>
                 </a:solidFill>
                 <a:latin typeface="Amiri" pitchFamily="2" charset="-78"/>
+                <a:ea typeface="Amiri" pitchFamily="2" charset="-78"/>
                 <a:cs typeface="Amiri" pitchFamily="2" charset="-78"/>
               </a:rPr>
               <a:t>خَمْسَةُ كِيلُوغْرَامَاتٍ</a:t>
@@ -34781,6 +35009,7 @@
                   <a:srgbClr val="1B3B6F"/>
                 </a:solidFill>
                 <a:latin typeface="Amiri" pitchFamily="2" charset="-78"/>
+                <a:ea typeface="Amiri" pitchFamily="2" charset="-78"/>
                 <a:cs typeface="Amiri" pitchFamily="2" charset="-78"/>
               </a:rPr>
               <a:t>كِيلُوغْرَامَانِ</a:t>
@@ -35046,6 +35275,7 @@
                   <a:srgbClr val="1B3B6F"/>
                 </a:solidFill>
                 <a:latin typeface="Amiri" pitchFamily="2" charset="-78"/>
+                <a:ea typeface="Amiri" pitchFamily="2" charset="-78"/>
                 <a:cs typeface="Amiri" pitchFamily="2" charset="-78"/>
               </a:rPr>
               <a:t>مُرَبَّعٌ</a:t>
@@ -35203,6 +35433,7 @@
                   <a:srgbClr val="1B3B6F"/>
                 </a:solidFill>
                 <a:latin typeface="Amiri" pitchFamily="2" charset="-78"/>
+                <a:ea typeface="Amiri" pitchFamily="2" charset="-78"/>
                 <a:cs typeface="Amiri" pitchFamily="2" charset="-78"/>
               </a:rPr>
               <a:t>مُرَبَّعٌ · مُرَبَّعَاتٌ</a:t>
@@ -35306,6 +35537,7 @@
                   <a:srgbClr val="1B3B6F"/>
                 </a:solidFill>
                 <a:latin typeface="Amiri" pitchFamily="2" charset="-78"/>
+                <a:ea typeface="Amiri" pitchFamily="2" charset="-78"/>
                 <a:cs typeface="Amiri" pitchFamily="2" charset="-78"/>
               </a:rPr>
               <a:t>مُرَبَّعَةٌ</a:t>
@@ -35571,6 +35803,7 @@
                   <a:srgbClr val="1B3B6F"/>
                 </a:solidFill>
                 <a:latin typeface="Amiri" pitchFamily="2" charset="-78"/>
+                <a:ea typeface="Amiri" pitchFamily="2" charset="-78"/>
                 <a:cs typeface="Amiri" pitchFamily="2" charset="-78"/>
               </a:rPr>
               <a:t>دَائِرِيٌّ · مُسْتَطِيلٌ</a:t>
@@ -35728,6 +35961,7 @@
                   <a:srgbClr val="1B3B6F"/>
                 </a:solidFill>
                 <a:latin typeface="Amiri" pitchFamily="2" charset="-78"/>
+                <a:ea typeface="Amiri" pitchFamily="2" charset="-78"/>
                 <a:cs typeface="Amiri" pitchFamily="2" charset="-78"/>
               </a:rPr>
               <a:t>دَائِرَةٌ</a:t>
@@ -35831,6 +36065,7 @@
                   <a:srgbClr val="1B3B6F"/>
                 </a:solidFill>
                 <a:latin typeface="Amiri" pitchFamily="2" charset="-78"/>
+                <a:ea typeface="Amiri" pitchFamily="2" charset="-78"/>
                 <a:cs typeface="Amiri" pitchFamily="2" charset="-78"/>
               </a:rPr>
               <a:t>دَائِرِيَّةٌ · مُسْتَطِيلَةٌ</a:t>
@@ -36096,6 +36331,7 @@
                   <a:srgbClr val="1B3B6F"/>
                 </a:solidFill>
                 <a:latin typeface="Amiri" pitchFamily="2" charset="-78"/>
+                <a:ea typeface="Amiri" pitchFamily="2" charset="-78"/>
                 <a:cs typeface="Amiri" pitchFamily="2" charset="-78"/>
               </a:rPr>
               <a:t>مَصْنُوعٌ مِنْ …</a:t>
@@ -36253,6 +36489,7 @@
                   <a:srgbClr val="1B3B6F"/>
                 </a:solidFill>
                 <a:latin typeface="Amiri" pitchFamily="2" charset="-78"/>
+                <a:ea typeface="Amiri" pitchFamily="2" charset="-78"/>
                 <a:cs typeface="Amiri" pitchFamily="2" charset="-78"/>
               </a:rPr>
               <a:t>مِمَّ هُوَ مَصْنُوعٌ؟</a:t>
@@ -36356,6 +36593,7 @@
                   <a:srgbClr val="1B3B6F"/>
                 </a:solidFill>
                 <a:latin typeface="Amiri" pitchFamily="2" charset="-78"/>
+                <a:ea typeface="Amiri" pitchFamily="2" charset="-78"/>
                 <a:cs typeface="Amiri" pitchFamily="2" charset="-78"/>
               </a:rPr>
               <a:t>مَصْنُوعَةٌ مِنْ</a:t>
@@ -36489,6 +36727,7 @@
                   <a:srgbClr val="D4AF37"/>
                 </a:solidFill>
                 <a:latin typeface="Amiri" pitchFamily="2" charset="-78"/>
+                <a:ea typeface="Amiri" pitchFamily="2" charset="-78"/>
                 <a:cs typeface="Amiri" pitchFamily="2" charset="-78"/>
               </a:rPr>
               <a:t>م</a:t>
@@ -36809,6 +37048,7 @@
                   <a:srgbClr val="8A6D1E"/>
                 </a:solidFill>
                 <a:latin typeface="Amiri" pitchFamily="2" charset="-78"/>
+                <a:ea typeface="Amiri" pitchFamily="2" charset="-78"/>
                 <a:cs typeface="Amiri" pitchFamily="2" charset="-78"/>
               </a:rPr>
               <a:t>مِمَّ هُوَ مَصْنُوعٌ؟</a:t>
@@ -37112,6 +37352,7 @@
                   <a:srgbClr val="1B3B6F"/>
                 </a:solidFill>
                 <a:latin typeface="Amiri" pitchFamily="2" charset="-78"/>
+                <a:ea typeface="Amiri" pitchFamily="2" charset="-78"/>
                 <a:cs typeface="Amiri" pitchFamily="2" charset="-78"/>
               </a:rPr>
               <a:t>خَشَبٌ · مَعْدِنٌ</a:t>
@@ -37269,6 +37510,7 @@
                   <a:srgbClr val="1B3B6F"/>
                 </a:solidFill>
                 <a:latin typeface="Amiri" pitchFamily="2" charset="-78"/>
+                <a:ea typeface="Amiri" pitchFamily="2" charset="-78"/>
                 <a:cs typeface="Amiri" pitchFamily="2" charset="-78"/>
               </a:rPr>
               <a:t>خَشَبِيَّةٌ · مَعْدِنِيَّةٌ</a:t>
@@ -37372,6 +37614,7 @@
                   <a:srgbClr val="1B3B6F"/>
                 </a:solidFill>
                 <a:latin typeface="Amiri" pitchFamily="2" charset="-78"/>
+                <a:ea typeface="Amiri" pitchFamily="2" charset="-78"/>
                 <a:cs typeface="Amiri" pitchFamily="2" charset="-78"/>
               </a:rPr>
               <a:t>خَشَبِيٌّ · مَعْدِنِيٌّ</a:t>
@@ -37637,6 +37880,7 @@
                   <a:srgbClr val="1B3B6F"/>
                 </a:solidFill>
                 <a:latin typeface="Amiri" pitchFamily="2" charset="-78"/>
+                <a:ea typeface="Amiri" pitchFamily="2" charset="-78"/>
                 <a:cs typeface="Amiri" pitchFamily="2" charset="-78"/>
               </a:rPr>
               <a:t>زُجَاجٌ · بْلَاسْتِيكٌ</a:t>
@@ -37794,6 +38038,7 @@
                   <a:srgbClr val="1B3B6F"/>
                 </a:solidFill>
                 <a:latin typeface="Amiri" pitchFamily="2" charset="-78"/>
+                <a:ea typeface="Amiri" pitchFamily="2" charset="-78"/>
                 <a:cs typeface="Amiri" pitchFamily="2" charset="-78"/>
               </a:rPr>
               <a:t>زُجَاجِيَّةٌ · بْلَاسْتِيكِيَّةٌ</a:t>
@@ -37897,6 +38142,7 @@
                   <a:srgbClr val="1B3B6F"/>
                 </a:solidFill>
                 <a:latin typeface="Amiri" pitchFamily="2" charset="-78"/>
+                <a:ea typeface="Amiri" pitchFamily="2" charset="-78"/>
                 <a:cs typeface="Amiri" pitchFamily="2" charset="-78"/>
               </a:rPr>
               <a:t>زُجَاجِيٌّ · بْلَاسْتِيكِيٌّ</a:t>
@@ -38162,6 +38408,7 @@
                   <a:srgbClr val="1B3B6F"/>
                 </a:solidFill>
                 <a:latin typeface="Amiri" pitchFamily="2" charset="-78"/>
+                <a:ea typeface="Amiri" pitchFamily="2" charset="-78"/>
                 <a:cs typeface="Amiri" pitchFamily="2" charset="-78"/>
               </a:rPr>
               <a:t>قُطْنٌ · جِلْدٌ · صُوفٌ</a:t>
@@ -38319,6 +38566,7 @@
                   <a:srgbClr val="1B3B6F"/>
                 </a:solidFill>
                 <a:latin typeface="Amiri" pitchFamily="2" charset="-78"/>
+                <a:ea typeface="Amiri" pitchFamily="2" charset="-78"/>
                 <a:cs typeface="Amiri" pitchFamily="2" charset="-78"/>
               </a:rPr>
               <a:t>قُطْنِيٌّ · جِلْدِيٌّ · صُوفِيٌّ</a:t>
@@ -38584,6 +38832,7 @@
                   <a:srgbClr val="1B3B6F"/>
                 </a:solidFill>
                 <a:latin typeface="Amiri" pitchFamily="2" charset="-78"/>
+                <a:ea typeface="Amiri" pitchFamily="2" charset="-78"/>
                 <a:cs typeface="Amiri" pitchFamily="2" charset="-78"/>
               </a:rPr>
               <a:t>ثَقِيلٌ · خَفِيفٌ</a:t>
@@ -38741,6 +38990,7 @@
                   <a:srgbClr val="1B3B6F"/>
                 </a:solidFill>
                 <a:latin typeface="Amiri" pitchFamily="2" charset="-78"/>
+                <a:ea typeface="Amiri" pitchFamily="2" charset="-78"/>
                 <a:cs typeface="Amiri" pitchFamily="2" charset="-78"/>
               </a:rPr>
               <a:t>أَثْقَلُ · أَخَفُّ</a:t>
@@ -38844,6 +39094,7 @@
                   <a:srgbClr val="1B3B6F"/>
                 </a:solidFill>
                 <a:latin typeface="Amiri" pitchFamily="2" charset="-78"/>
+                <a:ea typeface="Amiri" pitchFamily="2" charset="-78"/>
                 <a:cs typeface="Amiri" pitchFamily="2" charset="-78"/>
               </a:rPr>
               <a:t>ثَقِيلَةٌ · خَفِيفَةٌ</a:t>
@@ -39109,6 +39360,7 @@
                   <a:srgbClr val="1B3B6F"/>
                 </a:solidFill>
                 <a:latin typeface="Amiri" pitchFamily="2" charset="-78"/>
+                <a:ea typeface="Amiri" pitchFamily="2" charset="-78"/>
                 <a:cs typeface="Amiri" pitchFamily="2" charset="-78"/>
               </a:rPr>
               <a:t>مُسْتَعْمَلٌ</a:t>
@@ -39266,6 +39518,7 @@
                   <a:srgbClr val="1B3B6F"/>
                 </a:solidFill>
                 <a:latin typeface="Amiri" pitchFamily="2" charset="-78"/>
+                <a:ea typeface="Amiri" pitchFamily="2" charset="-78"/>
                 <a:cs typeface="Amiri" pitchFamily="2" charset="-78"/>
               </a:rPr>
               <a:t>جَدِيدٌ · جَدِيدَةٌ</a:t>
@@ -39369,6 +39622,7 @@
                   <a:srgbClr val="1B3B6F"/>
                 </a:solidFill>
                 <a:latin typeface="Amiri" pitchFamily="2" charset="-78"/>
+                <a:ea typeface="Amiri" pitchFamily="2" charset="-78"/>
                 <a:cs typeface="Amiri" pitchFamily="2" charset="-78"/>
               </a:rPr>
               <a:t>مُسْتَعْمَلَةٌ</a:t>
@@ -39634,6 +39888,7 @@
                   <a:srgbClr val="1B3B6F"/>
                 </a:solidFill>
                 <a:latin typeface="Amiri" pitchFamily="2" charset="-78"/>
+                <a:ea typeface="Amiri" pitchFamily="2" charset="-78"/>
                 <a:cs typeface="Amiri" pitchFamily="2" charset="-78"/>
               </a:rPr>
               <a:t>قَابِلٌ لِلْكَسْرِ</a:t>
@@ -39791,6 +40046,7 @@
                   <a:srgbClr val="1B3B6F"/>
                 </a:solidFill>
                 <a:latin typeface="Amiri" pitchFamily="2" charset="-78"/>
+                <a:ea typeface="Amiri" pitchFamily="2" charset="-78"/>
                 <a:cs typeface="Amiri" pitchFamily="2" charset="-78"/>
               </a:rPr>
               <a:t>قَابِلٌ لِإِعَادَةِ التَّدْوِيرِ</a:t>
@@ -39894,6 +40150,7 @@
                   <a:srgbClr val="1B3B6F"/>
                 </a:solidFill>
                 <a:latin typeface="Amiri" pitchFamily="2" charset="-78"/>
+                <a:ea typeface="Amiri" pitchFamily="2" charset="-78"/>
                 <a:cs typeface="Amiri" pitchFamily="2" charset="-78"/>
               </a:rPr>
               <a:t>قَابِلَةٌ لِلْكَسْرِ</a:t>
@@ -40027,6 +40284,7 @@
                   <a:srgbClr val="D4AF37"/>
                 </a:solidFill>
                 <a:latin typeface="Amiri" pitchFamily="2" charset="-78"/>
+                <a:ea typeface="Amiri" pitchFamily="2" charset="-78"/>
                 <a:cs typeface="Amiri" pitchFamily="2" charset="-78"/>
               </a:rPr>
               <a:t>م</a:t>
@@ -40347,6 +40605,7 @@
                   <a:srgbClr val="8A6D1E"/>
                 </a:solidFill>
                 <a:latin typeface="Amiri" pitchFamily="2" charset="-78"/>
+                <a:ea typeface="Amiri" pitchFamily="2" charset="-78"/>
                 <a:cs typeface="Amiri" pitchFamily="2" charset="-78"/>
               </a:rPr>
               <a:t>فِي الغُرَفِ</a:t>
@@ -41523,6 +41782,7 @@
                   <a:srgbClr val="1B3B6F"/>
                 </a:solidFill>
                 <a:latin typeface="Amiri" pitchFamily="2" charset="-78"/>
+                <a:ea typeface="Amiri" pitchFamily="2" charset="-78"/>
                 <a:cs typeface="Amiri" pitchFamily="2" charset="-78"/>
               </a:rPr>
               <a:t>دَوْرُكَ!</a:t>
@@ -41599,6 +41859,7 @@
                   <a:srgbClr val="1B3B6F"/>
                 </a:solidFill>
                 <a:latin typeface="Amiri" pitchFamily="2" charset="-78"/>
+                <a:ea typeface="Amiri" pitchFamily="2" charset="-78"/>
                 <a:cs typeface="Amiri" pitchFamily="2" charset="-78"/>
               </a:rPr>
               <a:t>أَحْسَنْتَ! / أَحْسَنْتِ!</a:t>
@@ -41675,6 +41936,7 @@
                   <a:srgbClr val="1B3B6F"/>
                 </a:solidFill>
                 <a:latin typeface="Amiri" pitchFamily="2" charset="-78"/>
+                <a:ea typeface="Amiri" pitchFamily="2" charset="-78"/>
                 <a:cs typeface="Amiri" pitchFamily="2" charset="-78"/>
               </a:rPr>
               <a:t>تَكَلَّمْ أَكْثَرَ، مِنْ فَضْلِكَ</a:t>
@@ -41751,6 +42013,7 @@
                   <a:srgbClr val="1B3B6F"/>
                 </a:solidFill>
                 <a:latin typeface="Amiri" pitchFamily="2" charset="-78"/>
+                <a:ea typeface="Amiri" pitchFamily="2" charset="-78"/>
                 <a:cs typeface="Amiri" pitchFamily="2" charset="-78"/>
               </a:rPr>
               <a:t>لِمَاذَا؟</a:t>
@@ -41922,6 +42185,7 @@
                   <a:srgbClr val="D4AF37"/>
                 </a:solidFill>
                 <a:latin typeface="Amiri" pitchFamily="2" charset="-78"/>
+                <a:ea typeface="Amiri" pitchFamily="2" charset="-78"/>
                 <a:cs typeface="Amiri" pitchFamily="2" charset="-78"/>
               </a:rPr>
               <a:t>م</a:t>
@@ -42242,6 +42506,7 @@
                   <a:srgbClr val="8A6D1E"/>
                 </a:solidFill>
                 <a:latin typeface="Amiri" pitchFamily="2" charset="-78"/>
+                <a:ea typeface="Amiri" pitchFamily="2" charset="-78"/>
                 <a:cs typeface="Amiri" pitchFamily="2" charset="-78"/>
               </a:rPr>
               <a:t>مَكْتَبُ المَفْقُودَاتِ</a:t>
@@ -42522,6 +42787,7 @@
                   <a:srgbClr val="1B3B6F"/>
                 </a:solidFill>
                 <a:latin typeface="Amiri" pitchFamily="2" charset="-78"/>
+                <a:ea typeface="Amiri" pitchFamily="2" charset="-78"/>
                 <a:cs typeface="Amiri" pitchFamily="2" charset="-78"/>
               </a:rPr>
               <a:t>فَقَدْتُ …</a:t>
@@ -42598,6 +42864,7 @@
                   <a:srgbClr val="1B3B6F"/>
                 </a:solidFill>
                 <a:latin typeface="Amiri" pitchFamily="2" charset="-78"/>
+                <a:ea typeface="Amiri" pitchFamily="2" charset="-78"/>
                 <a:cs typeface="Amiri" pitchFamily="2" charset="-78"/>
               </a:rPr>
               <a:t>مَسَاءَ الخَيْرِ، مَاذَا فَقَدْتَ؟</a:t>
@@ -42766,6 +43033,7 @@
                   <a:srgbClr val="1B3B6F"/>
                 </a:solidFill>
                 <a:latin typeface="Amiri" pitchFamily="2" charset="-78"/>
+                <a:ea typeface="Amiri" pitchFamily="2" charset="-78"/>
                 <a:cs typeface="Amiri" pitchFamily="2" charset="-78"/>
               </a:rPr>
               <a:t>لَوْنُهَا …</a:t>
@@ -42842,6 +43110,7 @@
                   <a:srgbClr val="1B3B6F"/>
                 </a:solidFill>
                 <a:latin typeface="Amiri" pitchFamily="2" charset="-78"/>
+                <a:ea typeface="Amiri" pitchFamily="2" charset="-78"/>
                 <a:cs typeface="Amiri" pitchFamily="2" charset="-78"/>
               </a:rPr>
               <a:t>مَا لَوْنُهَا؟</a:t>
@@ -43010,6 +43279,7 @@
                   <a:srgbClr val="1B3B6F"/>
                 </a:solidFill>
                 <a:latin typeface="Amiri" pitchFamily="2" charset="-78"/>
+                <a:ea typeface="Amiri" pitchFamily="2" charset="-78"/>
                 <a:cs typeface="Amiri" pitchFamily="2" charset="-78"/>
               </a:rPr>
               <a:t>لَا، هِيَ … / ارْتِفَاعُهَا …</a:t>
@@ -43086,6 +43356,7 @@
                   <a:srgbClr val="1B3B6F"/>
                 </a:solidFill>
                 <a:latin typeface="Amiri" pitchFamily="2" charset="-78"/>
+                <a:ea typeface="Amiri" pitchFamily="2" charset="-78"/>
                 <a:cs typeface="Amiri" pitchFamily="2" charset="-78"/>
               </a:rPr>
               <a:t>هَلْ هِيَ كَبِيرَةٌ؟</a:t>
@@ -43254,6 +43525,7 @@
                   <a:srgbClr val="1B3B6F"/>
                 </a:solidFill>
                 <a:latin typeface="Amiri" pitchFamily="2" charset="-78"/>
+                <a:ea typeface="Amiri" pitchFamily="2" charset="-78"/>
                 <a:cs typeface="Amiri" pitchFamily="2" charset="-78"/>
               </a:rPr>
               <a:t>هِيَ مَصْنُوعَةٌ مِنْ …</a:t>
@@ -43330,6 +43602,7 @@
                   <a:srgbClr val="1B3B6F"/>
                 </a:solidFill>
                 <a:latin typeface="Amiri" pitchFamily="2" charset="-78"/>
+                <a:ea typeface="Amiri" pitchFamily="2" charset="-78"/>
                 <a:cs typeface="Amiri" pitchFamily="2" charset="-78"/>
               </a:rPr>
               <a:t>مِمَّ هِيَ مَصْنُوعَةٌ؟</a:t>
@@ -43498,6 +43771,7 @@
                   <a:srgbClr val="1B3B6F"/>
                 </a:solidFill>
                 <a:latin typeface="Amiri" pitchFamily="2" charset="-78"/>
+                <a:ea typeface="Amiri" pitchFamily="2" charset="-78"/>
                 <a:cs typeface="Amiri" pitchFamily="2" charset="-78"/>
               </a:rPr>
               <a:t>كَانَ فِيهَا … وَ…</a:t>
@@ -43574,6 +43848,7 @@
                   <a:srgbClr val="1B3B6F"/>
                 </a:solidFill>
                 <a:latin typeface="Amiri" pitchFamily="2" charset="-78"/>
+                <a:ea typeface="Amiri" pitchFamily="2" charset="-78"/>
                 <a:cs typeface="Amiri" pitchFamily="2" charset="-78"/>
               </a:rPr>
               <a:t>مَاذَا كَانَ فِيهَا؟</a:t>
@@ -43848,6 +44123,7 @@
                   <a:srgbClr val="D4AF37"/>
                 </a:solidFill>
                 <a:latin typeface="Amiri" pitchFamily="2" charset="-78"/>
+                <a:ea typeface="Amiri" pitchFamily="2" charset="-78"/>
                 <a:cs typeface="Amiri" pitchFamily="2" charset="-78"/>
               </a:rPr>
               <a:t>م</a:t>
@@ -44168,6 +44444,7 @@
                   <a:srgbClr val="8A6D1E"/>
                 </a:solidFill>
                 <a:latin typeface="Amiri" pitchFamily="2" charset="-78"/>
+                <a:ea typeface="Amiri" pitchFamily="2" charset="-78"/>
                 <a:cs typeface="Amiri" pitchFamily="2" charset="-78"/>
               </a:rPr>
               <a:t>شِرَاءُ مَكْتَبٍ</a:t>
@@ -44448,6 +44725,7 @@
                   <a:srgbClr val="1B3B6F"/>
                 </a:solidFill>
                 <a:latin typeface="Amiri" pitchFamily="2" charset="-78"/>
+                <a:ea typeface="Amiri" pitchFamily="2" charset="-78"/>
                 <a:cs typeface="Amiri" pitchFamily="2" charset="-78"/>
               </a:rPr>
               <a:t>أُرِيدُ … لِغُرْفَتِي</a:t>
@@ -44524,6 +44802,7 @@
                   <a:srgbClr val="1B3B6F"/>
                 </a:solidFill>
                 <a:latin typeface="Amiri" pitchFamily="2" charset="-78"/>
+                <a:ea typeface="Amiri" pitchFamily="2" charset="-78"/>
                 <a:cs typeface="Amiri" pitchFamily="2" charset="-78"/>
               </a:rPr>
               <a:t>أَهْلًا، كَيْفَ أُسَاعِدُكَ؟</a:t>
@@ -44692,6 +44971,7 @@
                   <a:srgbClr val="1B3B6F"/>
                 </a:solidFill>
                 <a:latin typeface="Amiri" pitchFamily="2" charset="-78"/>
+                <a:ea typeface="Amiri" pitchFamily="2" charset="-78"/>
                 <a:cs typeface="Amiri" pitchFamily="2" charset="-78"/>
               </a:rPr>
               <a:t>كَمْ طُولُهُ؟</a:t>
@@ -44768,6 +45048,7 @@
                   <a:srgbClr val="1B3B6F"/>
                 </a:solidFill>
                 <a:latin typeface="Amiri" pitchFamily="2" charset="-78"/>
+                <a:ea typeface="Amiri" pitchFamily="2" charset="-78"/>
                 <a:cs typeface="Amiri" pitchFamily="2" charset="-78"/>
               </a:rPr>
               <a:t>هٰذَا المَكْتَبُ مُمْتَازٌ.</a:t>
@@ -44936,6 +45217,7 @@
                   <a:srgbClr val="1B3B6F"/>
                 </a:solidFill>
                 <a:latin typeface="Amiri" pitchFamily="2" charset="-78"/>
+                <a:ea typeface="Amiri" pitchFamily="2" charset="-78"/>
                 <a:cs typeface="Amiri" pitchFamily="2" charset="-78"/>
               </a:rPr>
               <a:t>هٰذَا … لِأَنَّ … طُولُهُ …</a:t>
@@ -45012,6 +45294,7 @@
                   <a:srgbClr val="1B3B6F"/>
                 </a:solidFill>
                 <a:latin typeface="Amiri" pitchFamily="2" charset="-78"/>
+                <a:ea typeface="Amiri" pitchFamily="2" charset="-78"/>
                 <a:cs typeface="Amiri" pitchFamily="2" charset="-78"/>
               </a:rPr>
               <a:t>طُولُهُ مِتْرٌ وَنِصْفٌ.</a:t>
@@ -45115,6 +45398,7 @@
                   <a:srgbClr val="1B3B6F"/>
                 </a:solidFill>
                 <a:latin typeface="Amiri" pitchFamily="2" charset="-78"/>
+                <a:ea typeface="Amiri" pitchFamily="2" charset="-78"/>
                 <a:cs typeface="Amiri" pitchFamily="2" charset="-78"/>
               </a:rPr>
               <a:t>مِمَّ هُوَ مَصْنُوعٌ؟ وَهَلْ هُوَ …؟</a:t>
@@ -45191,6 +45475,7 @@
                   <a:srgbClr val="1B3B6F"/>
                 </a:solidFill>
                 <a:latin typeface="Amiri" pitchFamily="2" charset="-78"/>
+                <a:ea typeface="Amiri" pitchFamily="2" charset="-78"/>
                 <a:cs typeface="Amiri" pitchFamily="2" charset="-78"/>
               </a:rPr>
               <a:t>عِنْدَنَا هٰذَا: طُولُهُ تِسْعُونَ سَنْتِيمِتْرًا.</a:t>
@@ -45294,6 +45579,7 @@
                   <a:srgbClr val="1B3B6F"/>
                 </a:solidFill>
                 <a:latin typeface="Amiri" pitchFamily="2" charset="-78"/>
+                <a:ea typeface="Amiri" pitchFamily="2" charset="-78"/>
                 <a:cs typeface="Amiri" pitchFamily="2" charset="-78"/>
               </a:rPr>
               <a:t>نَعَمْ، لِأَنَّهُ …</a:t>
@@ -45373,6 +45659,7 @@
                   <a:srgbClr val="1B3B6F"/>
                 </a:solidFill>
                 <a:latin typeface="Amiri" pitchFamily="2" charset="-78"/>
+                <a:ea typeface="Amiri" pitchFamily="2" charset="-78"/>
                 <a:cs typeface="Amiri" pitchFamily="2" charset="-78"/>
               </a:rPr>
               <a:t>مِنَ الخَشَبِ، وَوَزْنُهُ عِشْرُونَ كِيلُوغْرَامًا. هَلْ تُرِيدُ التَّوْصِيلَ؟</a:t>
@@ -45547,13 +45834,9 @@
     <a:fontScheme name="Office">
       <a:majorFont>
         <a:latin typeface="Calibri Light" panose="020F0302020204030204"/>
-        <a:ea typeface=""/>
-        <a:cs typeface=""/>
-        <a:font script="Jpan" typeface="游ゴシック Light"/>
-        <a:font script="Hang" typeface="맑은 고딕"/>
-        <a:font script="Hans" typeface="等线 Light"/>
-        <a:font script="Hant" typeface="新細明體"/>
-        <a:font script="Arab" typeface="Times New Roman"/>
+        <a:ea typeface="Amiri" pitchFamily="2" charset="-78"/>
+        <a:cs typeface="Amiri" pitchFamily="2" charset="-78"/>
+        <a:font script="Arab" typeface="Amiri"/>
         <a:font script="Hebr" typeface="Times New Roman"/>
         <a:font script="Thai" typeface="Angsana New"/>
         <a:font script="Ethi" typeface="Nyala"/>
@@ -45599,13 +45882,9 @@
       </a:majorFont>
       <a:minorFont>
         <a:latin typeface="Calibri" panose="020F0502020204030204"/>
-        <a:ea typeface=""/>
-        <a:cs typeface=""/>
-        <a:font script="Jpan" typeface="游ゴシック"/>
-        <a:font script="Hang" typeface="맑은 고딕"/>
-        <a:font script="Hans" typeface="等线"/>
-        <a:font script="Hant" typeface="新細明體"/>
-        <a:font script="Arab" typeface="Arial"/>
+        <a:ea typeface="Amiri" pitchFamily="2" charset="-78"/>
+        <a:cs typeface="Amiri" pitchFamily="2" charset="-78"/>
+        <a:font script="Arab" typeface="Amiri"/>
         <a:font script="Hebr" typeface="Arial"/>
         <a:font script="Thai" typeface="Cordia New"/>
         <a:font script="Ethi" typeface="Nyala"/>
